--- a/ゲーム科2年/01_後期/ゲームAI概論/03_戦略処理.pptx
+++ b/ゲーム科2年/01_後期/ゲームAI概論/03_戦略処理.pptx
@@ -6,15 +6,18 @@
   </p:sldMasterIdLst>
   <p:sldIdLst>
     <p:sldId id="257" r:id="rId2"/>
-    <p:sldId id="256" r:id="rId3"/>
+    <p:sldId id="263" r:id="rId3"/>
     <p:sldId id="258" r:id="rId4"/>
     <p:sldId id="259" r:id="rId5"/>
     <p:sldId id="260" r:id="rId6"/>
     <p:sldId id="261" r:id="rId7"/>
     <p:sldId id="262" r:id="rId8"/>
-    <p:sldId id="263" r:id="rId9"/>
-    <p:sldId id="264" r:id="rId10"/>
-    <p:sldId id="265" r:id="rId11"/>
+    <p:sldId id="264" r:id="rId9"/>
+    <p:sldId id="265" r:id="rId10"/>
+    <p:sldId id="266" r:id="rId11"/>
+    <p:sldId id="267" r:id="rId12"/>
+    <p:sldId id="269" r:id="rId13"/>
+    <p:sldId id="268" r:id="rId14"/>
   </p:sldIdLst>
   <p:sldSz cx="12192000" cy="6858000"/>
   <p:notesSz cx="6858000" cy="9144000"/>
@@ -268,7 +271,7 @@
           <a:p>
             <a:fld id="{E9CC885B-4903-4D54-9A93-00025F12DED9}" type="datetimeFigureOut">
               <a:rPr kumimoji="1" lang="ja-JP" altLang="en-US" smtClean="0"/>
-              <a:t>2025/2/7</a:t>
+              <a:t>2025/7/9</a:t>
             </a:fld>
             <a:endParaRPr kumimoji="1" lang="ja-JP" altLang="en-US"/>
           </a:p>
@@ -498,7 +501,7 @@
           <a:p>
             <a:fld id="{E9CC885B-4903-4D54-9A93-00025F12DED9}" type="datetimeFigureOut">
               <a:rPr kumimoji="1" lang="ja-JP" altLang="en-US" smtClean="0"/>
-              <a:t>2025/2/7</a:t>
+              <a:t>2025/7/9</a:t>
             </a:fld>
             <a:endParaRPr kumimoji="1" lang="ja-JP" altLang="en-US"/>
           </a:p>
@@ -738,7 +741,7 @@
           <a:p>
             <a:fld id="{E9CC885B-4903-4D54-9A93-00025F12DED9}" type="datetimeFigureOut">
               <a:rPr kumimoji="1" lang="ja-JP" altLang="en-US" smtClean="0"/>
-              <a:t>2025/2/7</a:t>
+              <a:t>2025/7/9</a:t>
             </a:fld>
             <a:endParaRPr kumimoji="1" lang="ja-JP" altLang="en-US"/>
           </a:p>
@@ -968,7 +971,7 @@
           <a:p>
             <a:fld id="{E9CC885B-4903-4D54-9A93-00025F12DED9}" type="datetimeFigureOut">
               <a:rPr kumimoji="1" lang="ja-JP" altLang="en-US" smtClean="0"/>
-              <a:t>2025/2/7</a:t>
+              <a:t>2025/7/9</a:t>
             </a:fld>
             <a:endParaRPr kumimoji="1" lang="ja-JP" altLang="en-US"/>
           </a:p>
@@ -1243,7 +1246,7 @@
           <a:p>
             <a:fld id="{E9CC885B-4903-4D54-9A93-00025F12DED9}" type="datetimeFigureOut">
               <a:rPr kumimoji="1" lang="ja-JP" altLang="en-US" smtClean="0"/>
-              <a:t>2025/2/7</a:t>
+              <a:t>2025/7/9</a:t>
             </a:fld>
             <a:endParaRPr kumimoji="1" lang="ja-JP" altLang="en-US"/>
           </a:p>
@@ -1572,7 +1575,7 @@
           <a:p>
             <a:fld id="{E9CC885B-4903-4D54-9A93-00025F12DED9}" type="datetimeFigureOut">
               <a:rPr kumimoji="1" lang="ja-JP" altLang="en-US" smtClean="0"/>
-              <a:t>2025/2/7</a:t>
+              <a:t>2025/7/9</a:t>
             </a:fld>
             <a:endParaRPr kumimoji="1" lang="ja-JP" altLang="en-US"/>
           </a:p>
@@ -2048,7 +2051,7 @@
           <a:p>
             <a:fld id="{E9CC885B-4903-4D54-9A93-00025F12DED9}" type="datetimeFigureOut">
               <a:rPr kumimoji="1" lang="ja-JP" altLang="en-US" smtClean="0"/>
-              <a:t>2025/2/7</a:t>
+              <a:t>2025/7/9</a:t>
             </a:fld>
             <a:endParaRPr kumimoji="1" lang="ja-JP" altLang="en-US"/>
           </a:p>
@@ -2189,7 +2192,7 @@
           <a:p>
             <a:fld id="{E9CC885B-4903-4D54-9A93-00025F12DED9}" type="datetimeFigureOut">
               <a:rPr kumimoji="1" lang="ja-JP" altLang="en-US" smtClean="0"/>
-              <a:t>2025/2/7</a:t>
+              <a:t>2025/7/9</a:t>
             </a:fld>
             <a:endParaRPr kumimoji="1" lang="ja-JP" altLang="en-US"/>
           </a:p>
@@ -2302,7 +2305,7 @@
           <a:p>
             <a:fld id="{E9CC885B-4903-4D54-9A93-00025F12DED9}" type="datetimeFigureOut">
               <a:rPr kumimoji="1" lang="ja-JP" altLang="en-US" smtClean="0"/>
-              <a:t>2025/2/7</a:t>
+              <a:t>2025/7/9</a:t>
             </a:fld>
             <a:endParaRPr kumimoji="1" lang="ja-JP" altLang="en-US"/>
           </a:p>
@@ -2645,7 +2648,7 @@
           <a:p>
             <a:fld id="{E9CC885B-4903-4D54-9A93-00025F12DED9}" type="datetimeFigureOut">
               <a:rPr kumimoji="1" lang="ja-JP" altLang="en-US" smtClean="0"/>
-              <a:t>2025/2/7</a:t>
+              <a:t>2025/7/9</a:t>
             </a:fld>
             <a:endParaRPr kumimoji="1" lang="ja-JP" altLang="en-US"/>
           </a:p>
@@ -2933,7 +2936,7 @@
           <a:p>
             <a:fld id="{E9CC885B-4903-4D54-9A93-00025F12DED9}" type="datetimeFigureOut">
               <a:rPr kumimoji="1" lang="ja-JP" altLang="en-US" smtClean="0"/>
-              <a:t>2025/2/7</a:t>
+              <a:t>2025/7/9</a:t>
             </a:fld>
             <a:endParaRPr kumimoji="1" lang="ja-JP" altLang="en-US"/>
           </a:p>
@@ -3206,7 +3209,7 @@
           <a:p>
             <a:fld id="{E9CC885B-4903-4D54-9A93-00025F12DED9}" type="datetimeFigureOut">
               <a:rPr kumimoji="1" lang="ja-JP" altLang="en-US" smtClean="0"/>
-              <a:t>2025/2/7</a:t>
+              <a:t>2025/7/9</a:t>
             </a:fld>
             <a:endParaRPr kumimoji="1" lang="ja-JP" altLang="en-US"/>
           </a:p>
@@ -3638,7 +3641,7 @@
         <p:spPr>
           <a:xfrm>
             <a:off x="567542" y="491954"/>
-            <a:ext cx="3199915" cy="584775"/>
+            <a:ext cx="1826141" cy="584775"/>
           </a:xfrm>
           <a:prstGeom prst="rect">
             <a:avLst/>
@@ -3652,12 +3655,8 @@
           <a:lstStyle/>
           <a:p>
             <a:r>
-              <a:rPr kumimoji="1" lang="en-US" altLang="ja-JP" sz="3200" b="1" u="sng" dirty="0"/>
-              <a:t>3D</a:t>
-            </a:r>
-            <a:r>
               <a:rPr kumimoji="1" lang="ja-JP" altLang="en-US" sz="3200" b="1" u="sng" dirty="0"/>
-              <a:t>モデルの作成</a:t>
+              <a:t>戦略処理</a:t>
             </a:r>
             <a:endParaRPr kumimoji="1" lang="en-US" altLang="ja-JP" sz="3200" b="1" u="sng" dirty="0"/>
           </a:p>
@@ -3678,7 +3677,7 @@
         <p:spPr>
           <a:xfrm>
             <a:off x="567542" y="1216429"/>
-            <a:ext cx="10825399" cy="3046988"/>
+            <a:ext cx="4168129" cy="461665"/>
           </a:xfrm>
           <a:prstGeom prst="rect">
             <a:avLst/>
@@ -3693,142 +3692,183 @@
           <a:p>
             <a:r>
               <a:rPr kumimoji="1" lang="en-US" altLang="ja-JP" sz="2400" dirty="0"/>
-              <a:t>3D</a:t>
+              <a:t>AI</a:t>
             </a:r>
             <a:r>
               <a:rPr kumimoji="1" lang="ja-JP" altLang="en-US" sz="2400" dirty="0"/>
-              <a:t>モデルをゲームで使用する際は、</a:t>
-            </a:r>
-            <a:r>
-              <a:rPr kumimoji="1" lang="en-US" altLang="ja-JP" sz="2400" b="1" dirty="0">
+              <a:t>の戦略処理を実装します。</a:t>
+            </a:r>
+            <a:endParaRPr kumimoji="1" lang="en-US" altLang="ja-JP" sz="2400" dirty="0"/>
+          </a:p>
+        </p:txBody>
+      </p:sp>
+      <p:sp>
+        <p:nvSpPr>
+          <p:cNvPr id="5" name="正方形/長方形 4">
+            <a:extLst>
+              <a:ext uri="{FF2B5EF4-FFF2-40B4-BE49-F238E27FC236}">
+                <a16:creationId xmlns:a16="http://schemas.microsoft.com/office/drawing/2014/main" id="{6809B028-B280-490E-AAD4-751A3ECDF151}"/>
+              </a:ext>
+            </a:extLst>
+          </p:cNvPr>
+          <p:cNvSpPr/>
+          <p:nvPr/>
+        </p:nvSpPr>
+        <p:spPr>
+          <a:xfrm>
+            <a:off x="567542" y="1817794"/>
+            <a:ext cx="6400801" cy="2214282"/>
+          </a:xfrm>
+          <a:prstGeom prst="rect">
+            <a:avLst/>
+          </a:prstGeom>
+        </p:spPr>
+        <p:style>
+          <a:lnRef idx="2">
+            <a:schemeClr val="accent1">
+              <a:shade val="50000"/>
+            </a:schemeClr>
+          </a:lnRef>
+          <a:fillRef idx="1">
+            <a:schemeClr val="accent1"/>
+          </a:fillRef>
+          <a:effectRef idx="0">
+            <a:schemeClr val="accent1"/>
+          </a:effectRef>
+          <a:fontRef idx="minor">
+            <a:schemeClr val="lt1"/>
+          </a:fontRef>
+        </p:style>
+        <p:txBody>
+          <a:bodyPr rtlCol="0" anchor="t"/>
+          <a:lstStyle/>
+          <a:p>
+            <a:r>
+              <a:rPr lang="ja-JP" altLang="en-US" b="1" dirty="0"/>
+              <a:t>戦略</a:t>
+            </a:r>
+            <a:r>
+              <a:rPr lang="en-US" altLang="ja-JP" b="1" dirty="0"/>
+              <a:t>A</a:t>
+            </a:r>
+          </a:p>
+          <a:p>
+            <a:endParaRPr lang="en-US" altLang="ja-JP" b="1" dirty="0"/>
+          </a:p>
+          <a:p>
+            <a:r>
+              <a:rPr lang="ja-JP" altLang="en-US" b="1" dirty="0"/>
+              <a:t>・プレイヤーとの距離が遠ければ</a:t>
+            </a:r>
+            <a:r>
+              <a:rPr lang="ja-JP" altLang="en-US" b="1" dirty="0">
                 <a:solidFill>
-                  <a:srgbClr val="FF0000"/>
+                  <a:srgbClr val="FFFF00"/>
                 </a:solidFill>
               </a:rPr>
-              <a:t>FBX</a:t>
-            </a:r>
-            <a:r>
-              <a:rPr kumimoji="1" lang="ja-JP" altLang="en-US" sz="2400" b="1" dirty="0">
+              <a:t>プレイヤーに近づく</a:t>
+            </a:r>
+            <a:endParaRPr lang="en-US" altLang="ja-JP" b="1" dirty="0">
+              <a:solidFill>
+                <a:srgbClr val="FFFF00"/>
+              </a:solidFill>
+            </a:endParaRPr>
+          </a:p>
+          <a:p>
+            <a:r>
+              <a:rPr lang="ja-JP" altLang="en-US" b="1" dirty="0"/>
+              <a:t>・近くにアイテムが落ちていれば</a:t>
+            </a:r>
+            <a:r>
+              <a:rPr lang="ja-JP" altLang="en-US" b="1" dirty="0">
                 <a:solidFill>
-                  <a:srgbClr val="FF0000"/>
+                  <a:srgbClr val="FFFF00"/>
                 </a:solidFill>
               </a:rPr>
-              <a:t>形式</a:t>
-            </a:r>
-            <a:r>
-              <a:rPr kumimoji="1" lang="ja-JP" altLang="en-US" sz="2400" dirty="0"/>
-              <a:t>のモデルが一般的です。</a:t>
-            </a:r>
-            <a:endParaRPr kumimoji="1" lang="en-US" altLang="ja-JP" sz="2400" dirty="0"/>
-          </a:p>
-          <a:p>
-            <a:r>
-              <a:rPr lang="ja-JP" altLang="en-US" sz="2400" dirty="0"/>
-              <a:t>しかし</a:t>
-            </a:r>
-            <a:r>
-              <a:rPr lang="en-US" altLang="ja-JP" sz="2400" b="1" dirty="0" err="1">
+              <a:t>アイテムを取りに行く</a:t>
+            </a:r>
+            <a:endParaRPr lang="en-US" altLang="ja-JP" b="1" dirty="0">
+              <a:solidFill>
+                <a:srgbClr val="FFFF00"/>
+              </a:solidFill>
+            </a:endParaRPr>
+          </a:p>
+          <a:p>
+            <a:r>
+              <a:rPr lang="ja-JP" altLang="en-US" b="1" dirty="0"/>
+              <a:t>・プレイヤーとの距離が近ければ</a:t>
+            </a:r>
+            <a:r>
+              <a:rPr lang="ja-JP" altLang="en-US" b="1" dirty="0">
                 <a:solidFill>
-                  <a:srgbClr val="FF0000"/>
+                  <a:srgbClr val="FFFF00"/>
                 </a:solidFill>
               </a:rPr>
-              <a:t>DxLib</a:t>
-            </a:r>
-            <a:r>
-              <a:rPr lang="ja-JP" altLang="en-US" sz="2400" b="1" dirty="0">
+              <a:t>攻撃する</a:t>
+            </a:r>
+            <a:endParaRPr lang="en-US" altLang="ja-JP" b="1" dirty="0">
+              <a:solidFill>
+                <a:srgbClr val="FFFF00"/>
+              </a:solidFill>
+            </a:endParaRPr>
+          </a:p>
+          <a:p>
+            <a:r>
+              <a:rPr lang="ja-JP" altLang="en-US" b="1" dirty="0"/>
+              <a:t>・残りの</a:t>
+            </a:r>
+            <a:r>
+              <a:rPr lang="en-US" altLang="ja-JP" b="1" dirty="0"/>
+              <a:t>HP</a:t>
+            </a:r>
+            <a:r>
+              <a:rPr lang="ja-JP" altLang="en-US" b="1" dirty="0"/>
+              <a:t>が少なければ</a:t>
+            </a:r>
+            <a:r>
+              <a:rPr lang="ja-JP" altLang="en-US" b="1" dirty="0">
                 <a:solidFill>
-                  <a:srgbClr val="FF0000"/>
+                  <a:srgbClr val="FFFF00"/>
                 </a:solidFill>
               </a:rPr>
-              <a:t>は</a:t>
-            </a:r>
-            <a:r>
-              <a:rPr lang="en-US" altLang="ja-JP" sz="2400" b="1" dirty="0">
+              <a:t>プレイヤーから逃げる</a:t>
+            </a:r>
+            <a:endParaRPr lang="en-US" altLang="ja-JP" b="1" dirty="0">
+              <a:solidFill>
+                <a:srgbClr val="FFFF00"/>
+              </a:solidFill>
+            </a:endParaRPr>
+          </a:p>
+          <a:p>
+            <a:r>
+              <a:rPr lang="ja-JP" altLang="en-US" b="1" dirty="0">
                 <a:solidFill>
-                  <a:srgbClr val="FF0000"/>
+                  <a:schemeClr val="bg1"/>
                 </a:solidFill>
               </a:rPr>
-              <a:t>FBX</a:t>
-            </a:r>
-            <a:r>
-              <a:rPr lang="ja-JP" altLang="en-US" sz="2400" b="1" dirty="0">
+              <a:t>・強さレベルが高いほど</a:t>
+            </a:r>
+            <a:r>
+              <a:rPr lang="ja-JP" altLang="en-US" b="1" dirty="0">
                 <a:solidFill>
-                  <a:srgbClr val="FF0000"/>
+                  <a:srgbClr val="FFFF00"/>
                 </a:solidFill>
               </a:rPr>
-              <a:t>ファイルをサポートしていません。</a:t>
-            </a:r>
-            <a:endParaRPr lang="en-US" altLang="ja-JP" sz="2400" b="1" dirty="0">
+              <a:t>行動</a:t>
+            </a:r>
+            <a:r>
+              <a:rPr lang="ja-JP" altLang="en-US" b="1" dirty="0">
+                <a:solidFill>
+                  <a:schemeClr val="bg1"/>
+                </a:solidFill>
+              </a:rPr>
+              <a:t>の切り替えが早くなる</a:t>
+            </a:r>
+            <a:endParaRPr lang="en-US" altLang="ja-JP" b="1" dirty="0">
               <a:solidFill>
-                <a:srgbClr val="FF0000"/>
+                <a:schemeClr val="bg1"/>
               </a:solidFill>
             </a:endParaRPr>
-          </a:p>
-          <a:p>
-            <a:endParaRPr kumimoji="1" lang="en-US" altLang="ja-JP" sz="2400" dirty="0"/>
-          </a:p>
-          <a:p>
-            <a:r>
-              <a:rPr kumimoji="1" lang="en-US" altLang="ja-JP" sz="2400" dirty="0"/>
-              <a:t>3D</a:t>
-            </a:r>
-            <a:r>
-              <a:rPr kumimoji="1" lang="ja-JP" altLang="en-US" sz="2400" dirty="0"/>
-              <a:t>モデルを自作したときは、</a:t>
-            </a:r>
-            <a:r>
-              <a:rPr kumimoji="1" lang="en-US" altLang="ja-JP" sz="2400" dirty="0" err="1"/>
-              <a:t>DxLib</a:t>
-            </a:r>
-            <a:r>
-              <a:rPr kumimoji="1" lang="ja-JP" altLang="en-US" sz="2400" dirty="0"/>
-              <a:t>でも使用できるように、</a:t>
-            </a:r>
-            <a:endParaRPr kumimoji="1" lang="en-US" altLang="ja-JP" sz="2400" dirty="0"/>
-          </a:p>
-          <a:p>
-            <a:r>
-              <a:rPr lang="ja-JP" altLang="en-US" sz="2400" dirty="0"/>
-              <a:t>ファイルを</a:t>
-            </a:r>
-            <a:r>
-              <a:rPr lang="ja-JP" altLang="en-US" sz="2400" b="1" dirty="0">
-                <a:solidFill>
-                  <a:srgbClr val="FF0000"/>
-                </a:solidFill>
-              </a:rPr>
-              <a:t>変換</a:t>
-            </a:r>
-            <a:r>
-              <a:rPr lang="ja-JP" altLang="en-US" sz="2400" dirty="0"/>
-              <a:t>していく必要があります。</a:t>
-            </a:r>
-            <a:endParaRPr lang="en-US" altLang="ja-JP" sz="2400" dirty="0"/>
-          </a:p>
-          <a:p>
-            <a:endParaRPr kumimoji="1" lang="en-US" altLang="ja-JP" sz="2400" dirty="0"/>
-          </a:p>
-          <a:p>
-            <a:r>
-              <a:rPr lang="ja-JP" altLang="en-US" sz="2400" dirty="0"/>
-              <a:t>また、</a:t>
-            </a:r>
-            <a:r>
-              <a:rPr lang="en-US" altLang="ja-JP" sz="2400" dirty="0"/>
-              <a:t>Blender</a:t>
-            </a:r>
-            <a:r>
-              <a:rPr lang="ja-JP" altLang="en-US" sz="2400" dirty="0"/>
-              <a:t>で保存する際も専用の設定をいくつかしなければいけません。</a:t>
-            </a:r>
-            <a:endParaRPr kumimoji="1" lang="en-US" altLang="ja-JP" sz="2400" dirty="0"/>
-          </a:p>
-          <a:p>
-            <a:r>
-              <a:rPr lang="ja-JP" altLang="en-US" sz="2400" dirty="0"/>
-              <a:t>手順は多いですが何度もやって慣れていきましょう。</a:t>
-            </a:r>
-            <a:endParaRPr kumimoji="1" lang="en-US" altLang="ja-JP" sz="2400" dirty="0"/>
           </a:p>
         </p:txBody>
       </p:sp>
@@ -3877,7 +3917,7 @@
         <p:spPr>
           <a:xfrm>
             <a:off x="567542" y="491954"/>
-            <a:ext cx="3199915" cy="584775"/>
+            <a:ext cx="1826141" cy="584775"/>
           </a:xfrm>
           <a:prstGeom prst="rect">
             <a:avLst/>
@@ -3891,12 +3931,8 @@
           <a:lstStyle/>
           <a:p>
             <a:r>
-              <a:rPr kumimoji="1" lang="en-US" altLang="ja-JP" sz="3200" b="1" u="sng" dirty="0"/>
-              <a:t>3D</a:t>
-            </a:r>
-            <a:r>
               <a:rPr kumimoji="1" lang="ja-JP" altLang="en-US" sz="3200" b="1" u="sng" dirty="0"/>
-              <a:t>モデルの作成</a:t>
+              <a:t>戦略処理</a:t>
             </a:r>
             <a:endParaRPr kumimoji="1" lang="en-US" altLang="ja-JP" sz="3200" b="1" u="sng" dirty="0"/>
           </a:p>
@@ -3917,7 +3953,7 @@
         <p:spPr>
           <a:xfrm>
             <a:off x="567542" y="1216429"/>
-            <a:ext cx="8704627" cy="1200329"/>
+            <a:ext cx="7970452" cy="461665"/>
           </a:xfrm>
           <a:prstGeom prst="rect">
             <a:avLst/>
@@ -3931,101 +3967,51 @@
           <a:lstStyle/>
           <a:p>
             <a:r>
-              <a:rPr kumimoji="1" lang="ja-JP" altLang="en-US" sz="2400" b="1" dirty="0">
+              <a:rPr lang="en-US" altLang="ja-JP" sz="2400" b="1" dirty="0" err="1">
                 <a:solidFill>
-                  <a:srgbClr val="FF0000"/>
+                  <a:srgbClr val="00B050"/>
                 </a:solidFill>
               </a:rPr>
-              <a:t>ゲームに必要なのは</a:t>
-            </a:r>
-            <a:r>
-              <a:rPr kumimoji="1" lang="en-US" altLang="ja-JP" sz="2400" b="1" dirty="0">
+              <a:t>AIManager</a:t>
+            </a:r>
+            <a:r>
+              <a:rPr lang="ja-JP" altLang="en-US" sz="2400" dirty="0"/>
+              <a:t>の</a:t>
+            </a:r>
+            <a:r>
+              <a:rPr lang="en-US" altLang="ja-JP" sz="2400" b="1" dirty="0">
                 <a:solidFill>
-                  <a:srgbClr val="FF0000"/>
+                  <a:srgbClr val="0070C0"/>
                 </a:solidFill>
               </a:rPr>
-              <a:t>X</a:t>
-            </a:r>
-            <a:r>
-              <a:rPr kumimoji="1" lang="ja-JP" altLang="en-US" sz="2400" b="1" dirty="0">
+              <a:t>Draw</a:t>
+            </a:r>
+            <a:r>
+              <a:rPr lang="ja-JP" altLang="en-US" sz="2400" dirty="0"/>
+              <a:t>と</a:t>
+            </a:r>
+            <a:r>
+              <a:rPr lang="en-US" altLang="ja-JP" sz="2400" b="1" dirty="0" err="1">
                 <a:solidFill>
-                  <a:srgbClr val="FF0000"/>
+                  <a:srgbClr val="0070C0"/>
                 </a:solidFill>
               </a:rPr>
-              <a:t>ファイルとテクスチャ画像</a:t>
-            </a:r>
-            <a:r>
-              <a:rPr kumimoji="1" lang="ja-JP" altLang="en-US" sz="2400" dirty="0"/>
-              <a:t>になります。</a:t>
-            </a:r>
-            <a:endParaRPr kumimoji="1" lang="en-US" altLang="ja-JP" sz="2400" dirty="0"/>
-          </a:p>
-          <a:p>
+              <a:t>DeleteInstance</a:t>
+            </a:r>
             <a:r>
               <a:rPr lang="ja-JP" altLang="en-US" sz="2400" dirty="0"/>
-              <a:t>それらを同じ場所に保存しておきましょう。</a:t>
+              <a:t>を呼びましょう。</a:t>
             </a:r>
             <a:endParaRPr lang="en-US" altLang="ja-JP" sz="2400" dirty="0"/>
-          </a:p>
-          <a:p>
-            <a:r>
-              <a:rPr kumimoji="1" lang="ja-JP" altLang="en-US" sz="2400" dirty="0"/>
-              <a:t>（今回は</a:t>
-            </a:r>
-            <a:r>
-              <a:rPr kumimoji="1" lang="en-US" altLang="ja-JP" sz="2400" b="1" dirty="0">
-                <a:solidFill>
-                  <a:srgbClr val="FF0000"/>
-                </a:solidFill>
-              </a:rPr>
-              <a:t>Project</a:t>
-            </a:r>
-            <a:r>
-              <a:rPr kumimoji="1" lang="ja-JP" altLang="en-US" sz="2400" b="1" dirty="0">
-                <a:solidFill>
-                  <a:srgbClr val="FF0000"/>
-                </a:solidFill>
-              </a:rPr>
-              <a:t>　＞　</a:t>
-            </a:r>
-            <a:r>
-              <a:rPr kumimoji="1" lang="en-US" altLang="ja-JP" sz="2400" b="1" dirty="0">
-                <a:solidFill>
-                  <a:srgbClr val="FF0000"/>
-                </a:solidFill>
-              </a:rPr>
-              <a:t>Resource</a:t>
-            </a:r>
-            <a:r>
-              <a:rPr kumimoji="1" lang="ja-JP" altLang="en-US" sz="2400" b="1" dirty="0">
-                <a:solidFill>
-                  <a:srgbClr val="FF0000"/>
-                </a:solidFill>
-              </a:rPr>
-              <a:t>　＞　</a:t>
-            </a:r>
-            <a:r>
-              <a:rPr kumimoji="1" lang="en-US" altLang="ja-JP" sz="2400" b="1" dirty="0">
-                <a:solidFill>
-                  <a:srgbClr val="FF0000"/>
-                </a:solidFill>
-              </a:rPr>
-              <a:t>Player</a:t>
-            </a:r>
-            <a:r>
-              <a:rPr kumimoji="1" lang="ja-JP" altLang="en-US" sz="2400" dirty="0"/>
-              <a:t>に保存）</a:t>
-            </a:r>
-            <a:endParaRPr kumimoji="1" lang="en-US" altLang="ja-JP" sz="2400" dirty="0"/>
           </a:p>
         </p:txBody>
       </p:sp>
       <p:pic>
         <p:nvPicPr>
-          <p:cNvPr id="3" name="図 2">
-            <a:extLst>
-              <a:ext uri="{FF2B5EF4-FFF2-40B4-BE49-F238E27FC236}">
-                <a16:creationId xmlns:a16="http://schemas.microsoft.com/office/drawing/2014/main" id="{1D457DD6-0334-471F-9AFA-449A1E743ABA}"/>
+          <p:cNvPr id="5" name="図 4">
+            <a:extLst>
+              <a:ext uri="{FF2B5EF4-FFF2-40B4-BE49-F238E27FC236}">
+                <a16:creationId xmlns:a16="http://schemas.microsoft.com/office/drawing/2014/main" id="{B905DC9D-1A1C-401F-BC21-55B8F52BC8EB}"/>
               </a:ext>
             </a:extLst>
           </p:cNvPr>
@@ -4035,21 +4021,643 @@
           <p:nvPr/>
         </p:nvPicPr>
         <p:blipFill>
-          <a:blip r:embed="rId2">
-            <a:extLst>
-              <a:ext uri="{28A0092B-C50C-407E-A947-70E740481C1C}">
-                <a14:useLocalDpi xmlns:a14="http://schemas.microsoft.com/office/drawing/2010/main" val="0"/>
-              </a:ext>
-            </a:extLst>
-          </a:blip>
+          <a:blip r:embed="rId2"/>
           <a:stretch>
             <a:fillRect/>
           </a:stretch>
         </p:blipFill>
         <p:spPr>
           <a:xfrm>
-            <a:off x="567542" y="2556458"/>
-            <a:ext cx="6210035" cy="3085113"/>
+            <a:off x="567542" y="1876065"/>
+            <a:ext cx="6106377" cy="1133633"/>
+          </a:xfrm>
+          <a:prstGeom prst="rect">
+            <a:avLst/>
+          </a:prstGeom>
+        </p:spPr>
+      </p:pic>
+      <p:pic>
+        <p:nvPicPr>
+          <p:cNvPr id="8" name="図 7">
+            <a:extLst>
+              <a:ext uri="{FF2B5EF4-FFF2-40B4-BE49-F238E27FC236}">
+                <a16:creationId xmlns:a16="http://schemas.microsoft.com/office/drawing/2014/main" id="{4DDFE4BD-1561-4A8E-A2F7-E2B8FB2654D8}"/>
+              </a:ext>
+            </a:extLst>
+          </p:cNvPr>
+          <p:cNvPicPr>
+            <a:picLocks noChangeAspect="1"/>
+          </p:cNvPicPr>
+          <p:nvPr/>
+        </p:nvPicPr>
+        <p:blipFill>
+          <a:blip r:embed="rId3"/>
+          <a:stretch>
+            <a:fillRect/>
+          </a:stretch>
+        </p:blipFill>
+        <p:spPr>
+          <a:xfrm>
+            <a:off x="551676" y="3735400"/>
+            <a:ext cx="5544324" cy="1162212"/>
+          </a:xfrm>
+          <a:prstGeom prst="rect">
+            <a:avLst/>
+          </a:prstGeom>
+        </p:spPr>
+      </p:pic>
+      <p:sp>
+        <p:nvSpPr>
+          <p:cNvPr id="9" name="正方形/長方形 8">
+            <a:extLst>
+              <a:ext uri="{FF2B5EF4-FFF2-40B4-BE49-F238E27FC236}">
+                <a16:creationId xmlns:a16="http://schemas.microsoft.com/office/drawing/2014/main" id="{106710A5-6795-4E2B-9ECF-091DCFC7435F}"/>
+              </a:ext>
+            </a:extLst>
+          </p:cNvPr>
+          <p:cNvSpPr/>
+          <p:nvPr/>
+        </p:nvSpPr>
+        <p:spPr>
+          <a:xfrm>
+            <a:off x="1918447" y="2307389"/>
+            <a:ext cx="3792071" cy="507529"/>
+          </a:xfrm>
+          <a:prstGeom prst="rect">
+            <a:avLst/>
+          </a:prstGeom>
+          <a:noFill/>
+          <a:ln w="38100">
+            <a:solidFill>
+              <a:srgbClr val="FF0000"/>
+            </a:solidFill>
+          </a:ln>
+        </p:spPr>
+        <p:style>
+          <a:lnRef idx="2">
+            <a:schemeClr val="accent1">
+              <a:shade val="50000"/>
+            </a:schemeClr>
+          </a:lnRef>
+          <a:fillRef idx="1">
+            <a:schemeClr val="accent1"/>
+          </a:fillRef>
+          <a:effectRef idx="0">
+            <a:schemeClr val="accent1"/>
+          </a:effectRef>
+          <a:fontRef idx="minor">
+            <a:schemeClr val="lt1"/>
+          </a:fontRef>
+        </p:style>
+        <p:txBody>
+          <a:bodyPr rtlCol="0" anchor="ctr"/>
+          <a:lstStyle/>
+          <a:p>
+            <a:pPr algn="ctr"/>
+            <a:endParaRPr kumimoji="1" lang="ja-JP" altLang="en-US"/>
+          </a:p>
+        </p:txBody>
+      </p:sp>
+      <p:sp>
+        <p:nvSpPr>
+          <p:cNvPr id="10" name="正方形/長方形 9">
+            <a:extLst>
+              <a:ext uri="{FF2B5EF4-FFF2-40B4-BE49-F238E27FC236}">
+                <a16:creationId xmlns:a16="http://schemas.microsoft.com/office/drawing/2014/main" id="{EF4EED77-D0D4-4609-8249-8B29E6F2ADD8}"/>
+              </a:ext>
+            </a:extLst>
+          </p:cNvPr>
+          <p:cNvSpPr/>
+          <p:nvPr/>
+        </p:nvSpPr>
+        <p:spPr>
+          <a:xfrm>
+            <a:off x="1724694" y="4390083"/>
+            <a:ext cx="3792071" cy="507529"/>
+          </a:xfrm>
+          <a:prstGeom prst="rect">
+            <a:avLst/>
+          </a:prstGeom>
+          <a:noFill/>
+          <a:ln w="38100">
+            <a:solidFill>
+              <a:srgbClr val="FF0000"/>
+            </a:solidFill>
+          </a:ln>
+        </p:spPr>
+        <p:style>
+          <a:lnRef idx="2">
+            <a:schemeClr val="accent1">
+              <a:shade val="50000"/>
+            </a:schemeClr>
+          </a:lnRef>
+          <a:fillRef idx="1">
+            <a:schemeClr val="accent1"/>
+          </a:fillRef>
+          <a:effectRef idx="0">
+            <a:schemeClr val="accent1"/>
+          </a:effectRef>
+          <a:fontRef idx="minor">
+            <a:schemeClr val="lt1"/>
+          </a:fontRef>
+        </p:style>
+        <p:txBody>
+          <a:bodyPr rtlCol="0" anchor="ctr"/>
+          <a:lstStyle/>
+          <a:p>
+            <a:pPr algn="ctr"/>
+            <a:endParaRPr kumimoji="1" lang="ja-JP" altLang="en-US"/>
+          </a:p>
+        </p:txBody>
+      </p:sp>
+    </p:spTree>
+    <p:extLst>
+      <p:ext uri="{BB962C8B-B14F-4D97-AF65-F5344CB8AC3E}">
+        <p14:creationId xmlns:p14="http://schemas.microsoft.com/office/powerpoint/2010/main" val="1112301014"/>
+      </p:ext>
+    </p:extLst>
+  </p:cSld>
+  <p:clrMapOvr>
+    <a:masterClrMapping/>
+  </p:clrMapOvr>
+</p:sld>
+</file>
+
+<file path=ppt/slides/slide11.xml><?xml version="1.0" encoding="utf-8"?>
+<p:sld xmlns:a="http://schemas.openxmlformats.org/drawingml/2006/main" xmlns:r="http://schemas.openxmlformats.org/officeDocument/2006/relationships" xmlns:p="http://schemas.openxmlformats.org/presentationml/2006/main">
+  <p:cSld>
+    <p:spTree>
+      <p:nvGrpSpPr>
+        <p:cNvPr id="1" name=""/>
+        <p:cNvGrpSpPr/>
+        <p:nvPr/>
+      </p:nvGrpSpPr>
+      <p:grpSpPr>
+        <a:xfrm>
+          <a:off x="0" y="0"/>
+          <a:ext cx="0" cy="0"/>
+          <a:chOff x="0" y="0"/>
+          <a:chExt cx="0" cy="0"/>
+        </a:xfrm>
+      </p:grpSpPr>
+      <p:sp>
+        <p:nvSpPr>
+          <p:cNvPr id="4" name="テキスト ボックス 3">
+            <a:extLst>
+              <a:ext uri="{FF2B5EF4-FFF2-40B4-BE49-F238E27FC236}">
+                <a16:creationId xmlns:a16="http://schemas.microsoft.com/office/drawing/2014/main" id="{5A13BF46-B8C5-48AA-8308-C9ECFF431A18}"/>
+              </a:ext>
+            </a:extLst>
+          </p:cNvPr>
+          <p:cNvSpPr txBox="1"/>
+          <p:nvPr/>
+        </p:nvSpPr>
+        <p:spPr>
+          <a:xfrm>
+            <a:off x="567542" y="491954"/>
+            <a:ext cx="1826141" cy="584775"/>
+          </a:xfrm>
+          <a:prstGeom prst="rect">
+            <a:avLst/>
+          </a:prstGeom>
+          <a:noFill/>
+        </p:spPr>
+        <p:txBody>
+          <a:bodyPr wrap="none" rtlCol="0">
+            <a:spAutoFit/>
+          </a:bodyPr>
+          <a:lstStyle/>
+          <a:p>
+            <a:r>
+              <a:rPr kumimoji="1" lang="ja-JP" altLang="en-US" sz="3200" b="1" u="sng" dirty="0"/>
+              <a:t>戦略処理</a:t>
+            </a:r>
+            <a:endParaRPr kumimoji="1" lang="en-US" altLang="ja-JP" sz="3200" b="1" u="sng" dirty="0"/>
+          </a:p>
+        </p:txBody>
+      </p:sp>
+      <p:sp>
+        <p:nvSpPr>
+          <p:cNvPr id="6" name="テキスト ボックス 5">
+            <a:extLst>
+              <a:ext uri="{FF2B5EF4-FFF2-40B4-BE49-F238E27FC236}">
+                <a16:creationId xmlns:a16="http://schemas.microsoft.com/office/drawing/2014/main" id="{55830AD6-028B-4C4E-80BF-B70DFC1C3A46}"/>
+              </a:ext>
+            </a:extLst>
+          </p:cNvPr>
+          <p:cNvSpPr txBox="1"/>
+          <p:nvPr/>
+        </p:nvSpPr>
+        <p:spPr>
+          <a:xfrm>
+            <a:off x="567542" y="1216429"/>
+            <a:ext cx="7952818" cy="830997"/>
+          </a:xfrm>
+          <a:prstGeom prst="rect">
+            <a:avLst/>
+          </a:prstGeom>
+          <a:noFill/>
+        </p:spPr>
+        <p:txBody>
+          <a:bodyPr wrap="none" rtlCol="0">
+            <a:spAutoFit/>
+          </a:bodyPr>
+          <a:lstStyle/>
+          <a:p>
+            <a:r>
+              <a:rPr lang="en-US" altLang="ja-JP" sz="2400" b="1" dirty="0">
+                <a:solidFill>
+                  <a:srgbClr val="FF0000"/>
+                </a:solidFill>
+              </a:rPr>
+              <a:t>AIPlayer.cpp</a:t>
+            </a:r>
+            <a:r>
+              <a:rPr lang="ja-JP" altLang="en-US" sz="2400" dirty="0"/>
+              <a:t>の</a:t>
+            </a:r>
+            <a:r>
+              <a:rPr lang="en-US" altLang="ja-JP" sz="2400" b="1" dirty="0">
+                <a:solidFill>
+                  <a:srgbClr val="0070C0"/>
+                </a:solidFill>
+              </a:rPr>
+              <a:t>Step</a:t>
+            </a:r>
+            <a:r>
+              <a:rPr lang="ja-JP" altLang="en-US" sz="2400" b="1" dirty="0">
+                <a:solidFill>
+                  <a:srgbClr val="0070C0"/>
+                </a:solidFill>
+              </a:rPr>
+              <a:t>関数</a:t>
+            </a:r>
+            <a:r>
+              <a:rPr lang="ja-JP" altLang="en-US" sz="2400" dirty="0"/>
+              <a:t>で</a:t>
+            </a:r>
+            <a:r>
+              <a:rPr lang="en-US" altLang="ja-JP" sz="2400" b="1" dirty="0" err="1">
+                <a:solidFill>
+                  <a:srgbClr val="0070C0"/>
+                </a:solidFill>
+              </a:rPr>
+              <a:t>ThinkStrategy</a:t>
+            </a:r>
+            <a:r>
+              <a:rPr lang="ja-JP" altLang="en-US" sz="2400" dirty="0"/>
+              <a:t>を呼び出し、</a:t>
+            </a:r>
+            <a:endParaRPr lang="en-US" altLang="ja-JP" sz="2400" dirty="0"/>
+          </a:p>
+          <a:p>
+            <a:r>
+              <a:rPr lang="ja-JP" altLang="en-US" sz="2400" dirty="0"/>
+              <a:t>戦略に合わせた行動関数を呼びましょう。</a:t>
+            </a:r>
+            <a:endParaRPr lang="en-US" altLang="ja-JP" sz="2400" dirty="0"/>
+          </a:p>
+        </p:txBody>
+      </p:sp>
+      <p:pic>
+        <p:nvPicPr>
+          <p:cNvPr id="3" name="図 2">
+            <a:extLst>
+              <a:ext uri="{FF2B5EF4-FFF2-40B4-BE49-F238E27FC236}">
+                <a16:creationId xmlns:a16="http://schemas.microsoft.com/office/drawing/2014/main" id="{A982337D-EEAF-4457-966A-B36A06BF2EBC}"/>
+              </a:ext>
+            </a:extLst>
+          </p:cNvPr>
+          <p:cNvPicPr>
+            <a:picLocks noChangeAspect="1"/>
+          </p:cNvPicPr>
+          <p:nvPr/>
+        </p:nvPicPr>
+        <p:blipFill>
+          <a:blip r:embed="rId2"/>
+          <a:stretch>
+            <a:fillRect/>
+          </a:stretch>
+        </p:blipFill>
+        <p:spPr>
+          <a:xfrm>
+            <a:off x="567542" y="2187126"/>
+            <a:ext cx="8002117" cy="4029637"/>
+          </a:xfrm>
+          <a:prstGeom prst="rect">
+            <a:avLst/>
+          </a:prstGeom>
+        </p:spPr>
+      </p:pic>
+      <p:sp>
+        <p:nvSpPr>
+          <p:cNvPr id="11" name="正方形/長方形 10">
+            <a:extLst>
+              <a:ext uri="{FF2B5EF4-FFF2-40B4-BE49-F238E27FC236}">
+                <a16:creationId xmlns:a16="http://schemas.microsoft.com/office/drawing/2014/main" id="{EB29C2AE-8BE4-418D-B9C4-DAA9424758A7}"/>
+              </a:ext>
+            </a:extLst>
+          </p:cNvPr>
+          <p:cNvSpPr/>
+          <p:nvPr/>
+        </p:nvSpPr>
+        <p:spPr>
+          <a:xfrm>
+            <a:off x="2303929" y="3926541"/>
+            <a:ext cx="6373906" cy="1715030"/>
+          </a:xfrm>
+          <a:prstGeom prst="rect">
+            <a:avLst/>
+          </a:prstGeom>
+          <a:noFill/>
+          <a:ln w="38100">
+            <a:solidFill>
+              <a:srgbClr val="FF0000"/>
+            </a:solidFill>
+          </a:ln>
+        </p:spPr>
+        <p:style>
+          <a:lnRef idx="2">
+            <a:schemeClr val="accent1">
+              <a:shade val="50000"/>
+            </a:schemeClr>
+          </a:lnRef>
+          <a:fillRef idx="1">
+            <a:schemeClr val="accent1"/>
+          </a:fillRef>
+          <a:effectRef idx="0">
+            <a:schemeClr val="accent1"/>
+          </a:effectRef>
+          <a:fontRef idx="minor">
+            <a:schemeClr val="lt1"/>
+          </a:fontRef>
+        </p:style>
+        <p:txBody>
+          <a:bodyPr rtlCol="0" anchor="ctr"/>
+          <a:lstStyle/>
+          <a:p>
+            <a:pPr algn="ctr"/>
+            <a:endParaRPr kumimoji="1" lang="ja-JP" altLang="en-US"/>
+          </a:p>
+        </p:txBody>
+      </p:sp>
+      <p:sp>
+        <p:nvSpPr>
+          <p:cNvPr id="12" name="正方形/長方形 11">
+            <a:extLst>
+              <a:ext uri="{FF2B5EF4-FFF2-40B4-BE49-F238E27FC236}">
+                <a16:creationId xmlns:a16="http://schemas.microsoft.com/office/drawing/2014/main" id="{542C7924-6482-4910-8415-13AE14473F78}"/>
+              </a:ext>
+            </a:extLst>
+          </p:cNvPr>
+          <p:cNvSpPr/>
+          <p:nvPr/>
+        </p:nvSpPr>
+        <p:spPr>
+          <a:xfrm>
+            <a:off x="2303929" y="2554941"/>
+            <a:ext cx="5181600" cy="618565"/>
+          </a:xfrm>
+          <a:prstGeom prst="rect">
+            <a:avLst/>
+          </a:prstGeom>
+          <a:noFill/>
+          <a:ln w="38100">
+            <a:solidFill>
+              <a:srgbClr val="FF0000"/>
+            </a:solidFill>
+          </a:ln>
+        </p:spPr>
+        <p:style>
+          <a:lnRef idx="2">
+            <a:schemeClr val="accent1">
+              <a:shade val="50000"/>
+            </a:schemeClr>
+          </a:lnRef>
+          <a:fillRef idx="1">
+            <a:schemeClr val="accent1"/>
+          </a:fillRef>
+          <a:effectRef idx="0">
+            <a:schemeClr val="accent1"/>
+          </a:effectRef>
+          <a:fontRef idx="minor">
+            <a:schemeClr val="lt1"/>
+          </a:fontRef>
+        </p:style>
+        <p:txBody>
+          <a:bodyPr rtlCol="0" anchor="ctr"/>
+          <a:lstStyle/>
+          <a:p>
+            <a:pPr algn="ctr"/>
+            <a:endParaRPr kumimoji="1" lang="ja-JP" altLang="en-US"/>
+          </a:p>
+        </p:txBody>
+      </p:sp>
+    </p:spTree>
+    <p:extLst>
+      <p:ext uri="{BB962C8B-B14F-4D97-AF65-F5344CB8AC3E}">
+        <p14:creationId xmlns:p14="http://schemas.microsoft.com/office/powerpoint/2010/main" val="347407374"/>
+      </p:ext>
+    </p:extLst>
+  </p:cSld>
+  <p:clrMapOvr>
+    <a:masterClrMapping/>
+  </p:clrMapOvr>
+</p:sld>
+</file>
+
+<file path=ppt/slides/slide12.xml><?xml version="1.0" encoding="utf-8"?>
+<p:sld xmlns:a="http://schemas.openxmlformats.org/drawingml/2006/main" xmlns:r="http://schemas.openxmlformats.org/officeDocument/2006/relationships" xmlns:p="http://schemas.openxmlformats.org/presentationml/2006/main">
+  <p:cSld>
+    <p:spTree>
+      <p:nvGrpSpPr>
+        <p:cNvPr id="1" name=""/>
+        <p:cNvGrpSpPr/>
+        <p:nvPr/>
+      </p:nvGrpSpPr>
+      <p:grpSpPr>
+        <a:xfrm>
+          <a:off x="0" y="0"/>
+          <a:ext cx="0" cy="0"/>
+          <a:chOff x="0" y="0"/>
+          <a:chExt cx="0" cy="0"/>
+        </a:xfrm>
+      </p:grpSpPr>
+      <p:sp>
+        <p:nvSpPr>
+          <p:cNvPr id="4" name="テキスト ボックス 3">
+            <a:extLst>
+              <a:ext uri="{FF2B5EF4-FFF2-40B4-BE49-F238E27FC236}">
+                <a16:creationId xmlns:a16="http://schemas.microsoft.com/office/drawing/2014/main" id="{5A13BF46-B8C5-48AA-8308-C9ECFF431A18}"/>
+              </a:ext>
+            </a:extLst>
+          </p:cNvPr>
+          <p:cNvSpPr txBox="1"/>
+          <p:nvPr/>
+        </p:nvSpPr>
+        <p:spPr>
+          <a:xfrm>
+            <a:off x="567542" y="491954"/>
+            <a:ext cx="1826141" cy="584775"/>
+          </a:xfrm>
+          <a:prstGeom prst="rect">
+            <a:avLst/>
+          </a:prstGeom>
+          <a:noFill/>
+        </p:spPr>
+        <p:txBody>
+          <a:bodyPr wrap="none" rtlCol="0">
+            <a:spAutoFit/>
+          </a:bodyPr>
+          <a:lstStyle/>
+          <a:p>
+            <a:r>
+              <a:rPr kumimoji="1" lang="ja-JP" altLang="en-US" sz="3200" b="1" u="sng" dirty="0"/>
+              <a:t>戦略処理</a:t>
+            </a:r>
+            <a:endParaRPr kumimoji="1" lang="en-US" altLang="ja-JP" sz="3200" b="1" u="sng" dirty="0"/>
+          </a:p>
+        </p:txBody>
+      </p:sp>
+      <p:sp>
+        <p:nvSpPr>
+          <p:cNvPr id="6" name="テキスト ボックス 5">
+            <a:extLst>
+              <a:ext uri="{FF2B5EF4-FFF2-40B4-BE49-F238E27FC236}">
+                <a16:creationId xmlns:a16="http://schemas.microsoft.com/office/drawing/2014/main" id="{55830AD6-028B-4C4E-80BF-B70DFC1C3A46}"/>
+              </a:ext>
+            </a:extLst>
+          </p:cNvPr>
+          <p:cNvSpPr txBox="1"/>
+          <p:nvPr/>
+        </p:nvSpPr>
+        <p:spPr>
+          <a:xfrm>
+            <a:off x="567542" y="1216429"/>
+            <a:ext cx="9110186" cy="830997"/>
+          </a:xfrm>
+          <a:prstGeom prst="rect">
+            <a:avLst/>
+          </a:prstGeom>
+          <a:noFill/>
+        </p:spPr>
+        <p:txBody>
+          <a:bodyPr wrap="none" rtlCol="0">
+            <a:spAutoFit/>
+          </a:bodyPr>
+          <a:lstStyle/>
+          <a:p>
+            <a:r>
+              <a:rPr lang="ja-JP" altLang="en-US" sz="2400" dirty="0"/>
+              <a:t>ターゲット座標など必要な情報はアクセサから取得しましょう。</a:t>
+            </a:r>
+            <a:endParaRPr lang="en-US" altLang="ja-JP" sz="2400" dirty="0"/>
+          </a:p>
+          <a:p>
+            <a:r>
+              <a:rPr lang="ja-JP" altLang="en-US" sz="2400" dirty="0"/>
+              <a:t>（</a:t>
+            </a:r>
+            <a:r>
+              <a:rPr lang="en-US" altLang="ja-JP" sz="2400" b="1" dirty="0">
+                <a:solidFill>
+                  <a:srgbClr val="FF0000"/>
+                </a:solidFill>
+              </a:rPr>
+              <a:t>AIPlayer.cpp</a:t>
+            </a:r>
+            <a:r>
+              <a:rPr lang="ja-JP" altLang="en-US" sz="2400" dirty="0"/>
+              <a:t>）</a:t>
+            </a:r>
+            <a:endParaRPr lang="en-US" altLang="ja-JP" sz="2400" dirty="0"/>
+          </a:p>
+        </p:txBody>
+      </p:sp>
+      <p:pic>
+        <p:nvPicPr>
+          <p:cNvPr id="8" name="図 7">
+            <a:extLst>
+              <a:ext uri="{FF2B5EF4-FFF2-40B4-BE49-F238E27FC236}">
+                <a16:creationId xmlns:a16="http://schemas.microsoft.com/office/drawing/2014/main" id="{7792A7F0-6718-44CA-82D3-745248AF6E7C}"/>
+              </a:ext>
+            </a:extLst>
+          </p:cNvPr>
+          <p:cNvPicPr>
+            <a:picLocks noChangeAspect="1"/>
+          </p:cNvPicPr>
+          <p:nvPr/>
+        </p:nvPicPr>
+        <p:blipFill>
+          <a:blip r:embed="rId2"/>
+          <a:stretch>
+            <a:fillRect/>
+          </a:stretch>
+        </p:blipFill>
+        <p:spPr>
+          <a:xfrm>
+            <a:off x="567542" y="2191608"/>
+            <a:ext cx="6782747" cy="685896"/>
+          </a:xfrm>
+          <a:prstGeom prst="rect">
+            <a:avLst/>
+          </a:prstGeom>
+        </p:spPr>
+      </p:pic>
+      <p:pic>
+        <p:nvPicPr>
+          <p:cNvPr id="10" name="図 9">
+            <a:extLst>
+              <a:ext uri="{FF2B5EF4-FFF2-40B4-BE49-F238E27FC236}">
+                <a16:creationId xmlns:a16="http://schemas.microsoft.com/office/drawing/2014/main" id="{61CFB9EB-E95D-4DC0-BC59-6B6DCF933EFD}"/>
+              </a:ext>
+            </a:extLst>
+          </p:cNvPr>
+          <p:cNvPicPr>
+            <a:picLocks noChangeAspect="1"/>
+          </p:cNvPicPr>
+          <p:nvPr/>
+        </p:nvPicPr>
+        <p:blipFill>
+          <a:blip r:embed="rId3"/>
+          <a:stretch>
+            <a:fillRect/>
+          </a:stretch>
+        </p:blipFill>
+        <p:spPr>
+          <a:xfrm>
+            <a:off x="567542" y="3429000"/>
+            <a:ext cx="5887272" cy="676369"/>
+          </a:xfrm>
+          <a:prstGeom prst="rect">
+            <a:avLst/>
+          </a:prstGeom>
+        </p:spPr>
+      </p:pic>
+      <p:pic>
+        <p:nvPicPr>
+          <p:cNvPr id="14" name="図 13">
+            <a:extLst>
+              <a:ext uri="{FF2B5EF4-FFF2-40B4-BE49-F238E27FC236}">
+                <a16:creationId xmlns:a16="http://schemas.microsoft.com/office/drawing/2014/main" id="{72D40AB2-3D84-48A2-88D8-C8B557D42FFB}"/>
+              </a:ext>
+            </a:extLst>
+          </p:cNvPr>
+          <p:cNvPicPr>
+            <a:picLocks noChangeAspect="1"/>
+          </p:cNvPicPr>
+          <p:nvPr/>
+        </p:nvPicPr>
+        <p:blipFill>
+          <a:blip r:embed="rId4"/>
+          <a:stretch>
+            <a:fillRect/>
+          </a:stretch>
+        </p:blipFill>
+        <p:spPr>
+          <a:xfrm>
+            <a:off x="567542" y="4442522"/>
+            <a:ext cx="5992061" cy="428685"/>
           </a:xfrm>
           <a:prstGeom prst="rect">
             <a:avLst/>
@@ -4059,7 +4667,155 @@
     </p:spTree>
     <p:extLst>
       <p:ext uri="{BB962C8B-B14F-4D97-AF65-F5344CB8AC3E}">
-        <p14:creationId xmlns:p14="http://schemas.microsoft.com/office/powerpoint/2010/main" val="2040065384"/>
+        <p14:creationId xmlns:p14="http://schemas.microsoft.com/office/powerpoint/2010/main" val="612310888"/>
+      </p:ext>
+    </p:extLst>
+  </p:cSld>
+  <p:clrMapOvr>
+    <a:masterClrMapping/>
+  </p:clrMapOvr>
+</p:sld>
+</file>
+
+<file path=ppt/slides/slide13.xml><?xml version="1.0" encoding="utf-8"?>
+<p:sld xmlns:a="http://schemas.openxmlformats.org/drawingml/2006/main" xmlns:r="http://schemas.openxmlformats.org/officeDocument/2006/relationships" xmlns:p="http://schemas.openxmlformats.org/presentationml/2006/main">
+  <p:cSld>
+    <p:spTree>
+      <p:nvGrpSpPr>
+        <p:cNvPr id="1" name=""/>
+        <p:cNvGrpSpPr/>
+        <p:nvPr/>
+      </p:nvGrpSpPr>
+      <p:grpSpPr>
+        <a:xfrm>
+          <a:off x="0" y="0"/>
+          <a:ext cx="0" cy="0"/>
+          <a:chOff x="0" y="0"/>
+          <a:chExt cx="0" cy="0"/>
+        </a:xfrm>
+      </p:grpSpPr>
+      <p:sp>
+        <p:nvSpPr>
+          <p:cNvPr id="4" name="テキスト ボックス 3">
+            <a:extLst>
+              <a:ext uri="{FF2B5EF4-FFF2-40B4-BE49-F238E27FC236}">
+                <a16:creationId xmlns:a16="http://schemas.microsoft.com/office/drawing/2014/main" id="{5A13BF46-B8C5-48AA-8308-C9ECFF431A18}"/>
+              </a:ext>
+            </a:extLst>
+          </p:cNvPr>
+          <p:cNvSpPr txBox="1"/>
+          <p:nvPr/>
+        </p:nvSpPr>
+        <p:spPr>
+          <a:xfrm>
+            <a:off x="567542" y="491954"/>
+            <a:ext cx="1826141" cy="584775"/>
+          </a:xfrm>
+          <a:prstGeom prst="rect">
+            <a:avLst/>
+          </a:prstGeom>
+          <a:noFill/>
+        </p:spPr>
+        <p:txBody>
+          <a:bodyPr wrap="none" rtlCol="0">
+            <a:spAutoFit/>
+          </a:bodyPr>
+          <a:lstStyle/>
+          <a:p>
+            <a:r>
+              <a:rPr kumimoji="1" lang="ja-JP" altLang="en-US" sz="3200" b="1" u="sng" dirty="0"/>
+              <a:t>戦略処理</a:t>
+            </a:r>
+            <a:endParaRPr kumimoji="1" lang="en-US" altLang="ja-JP" sz="3200" b="1" u="sng" dirty="0"/>
+          </a:p>
+        </p:txBody>
+      </p:sp>
+      <p:sp>
+        <p:nvSpPr>
+          <p:cNvPr id="6" name="テキスト ボックス 5">
+            <a:extLst>
+              <a:ext uri="{FF2B5EF4-FFF2-40B4-BE49-F238E27FC236}">
+                <a16:creationId xmlns:a16="http://schemas.microsoft.com/office/drawing/2014/main" id="{55830AD6-028B-4C4E-80BF-B70DFC1C3A46}"/>
+              </a:ext>
+            </a:extLst>
+          </p:cNvPr>
+          <p:cNvSpPr txBox="1"/>
+          <p:nvPr/>
+        </p:nvSpPr>
+        <p:spPr>
+          <a:xfrm>
+            <a:off x="567542" y="1216429"/>
+            <a:ext cx="7992894" cy="461665"/>
+          </a:xfrm>
+          <a:prstGeom prst="rect">
+            <a:avLst/>
+          </a:prstGeom>
+          <a:noFill/>
+        </p:spPr>
+        <p:txBody>
+          <a:bodyPr wrap="none" rtlCol="0">
+            <a:spAutoFit/>
+          </a:bodyPr>
+          <a:lstStyle/>
+          <a:p>
+            <a:r>
+              <a:rPr lang="en-US" altLang="ja-JP" sz="2400" dirty="0"/>
+              <a:t>CPU</a:t>
+            </a:r>
+            <a:r>
+              <a:rPr lang="ja-JP" altLang="en-US" sz="2400" dirty="0"/>
+              <a:t>プレイヤーが</a:t>
+            </a:r>
+            <a:r>
+              <a:rPr lang="en-US" altLang="ja-JP" sz="2400" b="1" dirty="0" err="1">
+                <a:solidFill>
+                  <a:srgbClr val="00B050"/>
+                </a:solidFill>
+              </a:rPr>
+              <a:t>AIPlayCPU</a:t>
+            </a:r>
+            <a:r>
+              <a:rPr lang="ja-JP" altLang="en-US" sz="2400" dirty="0"/>
+              <a:t>の戦略通りに行動します。</a:t>
+            </a:r>
+            <a:endParaRPr lang="en-US" altLang="ja-JP" sz="2400" dirty="0"/>
+          </a:p>
+        </p:txBody>
+      </p:sp>
+      <p:pic>
+        <p:nvPicPr>
+          <p:cNvPr id="5" name="図 4">
+            <a:extLst>
+              <a:ext uri="{FF2B5EF4-FFF2-40B4-BE49-F238E27FC236}">
+                <a16:creationId xmlns:a16="http://schemas.microsoft.com/office/drawing/2014/main" id="{B62D87C5-7C98-4414-99FD-3678336E1ECD}"/>
+              </a:ext>
+            </a:extLst>
+          </p:cNvPr>
+          <p:cNvPicPr>
+            <a:picLocks noChangeAspect="1"/>
+          </p:cNvPicPr>
+          <p:nvPr/>
+        </p:nvPicPr>
+        <p:blipFill>
+          <a:blip r:embed="rId2"/>
+          <a:stretch>
+            <a:fillRect/>
+          </a:stretch>
+        </p:blipFill>
+        <p:spPr>
+          <a:xfrm>
+            <a:off x="567542" y="1817794"/>
+            <a:ext cx="7572411" cy="4405422"/>
+          </a:xfrm>
+          <a:prstGeom prst="rect">
+            <a:avLst/>
+          </a:prstGeom>
+        </p:spPr>
+      </p:pic>
+    </p:spTree>
+    <p:extLst>
+      <p:ext uri="{BB962C8B-B14F-4D97-AF65-F5344CB8AC3E}">
+        <p14:creationId xmlns:p14="http://schemas.microsoft.com/office/powerpoint/2010/main" val="373468192"/>
       </p:ext>
     </p:extLst>
   </p:cSld>
@@ -4101,7 +4857,7 @@
         <p:spPr>
           <a:xfrm>
             <a:off x="567542" y="491954"/>
-            <a:ext cx="3199915" cy="584775"/>
+            <a:ext cx="1826141" cy="584775"/>
           </a:xfrm>
           <a:prstGeom prst="rect">
             <a:avLst/>
@@ -4115,12 +4871,8 @@
           <a:lstStyle/>
           <a:p>
             <a:r>
-              <a:rPr kumimoji="1" lang="en-US" altLang="ja-JP" sz="3200" b="1" u="sng" dirty="0"/>
-              <a:t>3D</a:t>
-            </a:r>
-            <a:r>
               <a:rPr kumimoji="1" lang="ja-JP" altLang="en-US" sz="3200" b="1" u="sng" dirty="0"/>
-              <a:t>モデルの作成</a:t>
+              <a:t>戦略処理</a:t>
             </a:r>
             <a:endParaRPr kumimoji="1" lang="en-US" altLang="ja-JP" sz="3200" b="1" u="sng" dirty="0"/>
           </a:p>
@@ -4141,7 +4893,7 @@
         <p:spPr>
           <a:xfrm>
             <a:off x="567542" y="1216429"/>
-            <a:ext cx="6949338" cy="830997"/>
+            <a:ext cx="4807726" cy="830997"/>
           </a:xfrm>
           <a:prstGeom prst="rect">
             <a:avLst/>
@@ -4156,74 +4908,22 @@
           <a:p>
             <a:r>
               <a:rPr kumimoji="1" lang="ja-JP" altLang="en-US" sz="2400" dirty="0"/>
-              <a:t>まずは</a:t>
-            </a:r>
-            <a:r>
-              <a:rPr kumimoji="1" lang="en-US" altLang="ja-JP" sz="2400" dirty="0"/>
-              <a:t>Blender</a:t>
-            </a:r>
-            <a:r>
-              <a:rPr kumimoji="1" lang="ja-JP" altLang="en-US" sz="2400" dirty="0"/>
-              <a:t>を使って</a:t>
-            </a:r>
-            <a:r>
-              <a:rPr kumimoji="1" lang="en-US" altLang="ja-JP" sz="2400" dirty="0"/>
-              <a:t>FBX</a:t>
-            </a:r>
-            <a:r>
-              <a:rPr kumimoji="1" lang="ja-JP" altLang="en-US" sz="2400" dirty="0"/>
-              <a:t>形式で保存します。</a:t>
+              <a:t>まずは戦略を定義します。</a:t>
             </a:r>
             <a:endParaRPr kumimoji="1" lang="en-US" altLang="ja-JP" sz="2400" dirty="0"/>
           </a:p>
           <a:p>
             <a:r>
-              <a:rPr lang="ja-JP" altLang="en-US" sz="2400" dirty="0"/>
-              <a:t>「</a:t>
-            </a:r>
-            <a:r>
-              <a:rPr lang="en-US" altLang="ja-JP" sz="2400" b="1" dirty="0">
+              <a:rPr lang="en-US" altLang="ja-JP" sz="2400" b="1" dirty="0" err="1">
                 <a:solidFill>
                   <a:srgbClr val="FF0000"/>
                 </a:solidFill>
               </a:rPr>
-              <a:t>File</a:t>
-            </a:r>
-            <a:r>
-              <a:rPr lang="ja-JP" altLang="en-US" sz="2400" b="1" dirty="0">
-                <a:solidFill>
-                  <a:srgbClr val="FF0000"/>
-                </a:solidFill>
-              </a:rPr>
-              <a:t>　＞　</a:t>
-            </a:r>
-            <a:r>
-              <a:rPr lang="en-US" altLang="ja-JP" sz="2400" b="1" dirty="0">
-                <a:solidFill>
-                  <a:srgbClr val="FF0000"/>
-                </a:solidFill>
-              </a:rPr>
-              <a:t>Export</a:t>
-            </a:r>
-            <a:r>
-              <a:rPr lang="ja-JP" altLang="en-US" sz="2400" b="1" dirty="0">
-                <a:solidFill>
-                  <a:srgbClr val="FF0000"/>
-                </a:solidFill>
-              </a:rPr>
-              <a:t>　＞　</a:t>
-            </a:r>
-            <a:r>
-              <a:rPr lang="en-US" altLang="ja-JP" sz="2400" b="1" dirty="0">
-                <a:solidFill>
-                  <a:srgbClr val="FF0000"/>
-                </a:solidFill>
-              </a:rPr>
-              <a:t>FBX</a:t>
+              <a:t>AIParameter.h</a:t>
             </a:r>
             <a:r>
               <a:rPr lang="ja-JP" altLang="en-US" sz="2400" dirty="0"/>
-              <a:t>」を選択します。</a:t>
+              <a:t>を書きましょう。</a:t>
             </a:r>
             <a:endParaRPr kumimoji="1" lang="en-US" altLang="ja-JP" sz="2400" dirty="0"/>
           </a:p>
@@ -4231,10 +4931,10 @@
       </p:sp>
       <p:pic>
         <p:nvPicPr>
-          <p:cNvPr id="3" name="図 2">
-            <a:extLst>
-              <a:ext uri="{FF2B5EF4-FFF2-40B4-BE49-F238E27FC236}">
-                <a16:creationId xmlns:a16="http://schemas.microsoft.com/office/drawing/2014/main" id="{EF5BC26A-E6ED-43C7-B5F2-9514EE0858C1}"/>
+          <p:cNvPr id="8" name="図 7">
+            <a:extLst>
+              <a:ext uri="{FF2B5EF4-FFF2-40B4-BE49-F238E27FC236}">
+                <a16:creationId xmlns:a16="http://schemas.microsoft.com/office/drawing/2014/main" id="{7F49ECA0-A1A0-4879-8B75-4D8889434D37}"/>
               </a:ext>
             </a:extLst>
           </p:cNvPr>
@@ -4244,85 +4944,25 @@
           <p:nvPr/>
         </p:nvPicPr>
         <p:blipFill>
-          <a:blip r:embed="rId2">
-            <a:extLst>
-              <a:ext uri="{28A0092B-C50C-407E-A947-70E740481C1C}">
-                <a14:useLocalDpi xmlns:a14="http://schemas.microsoft.com/office/drawing/2010/main" val="0"/>
-              </a:ext>
-            </a:extLst>
-          </a:blip>
+          <a:blip r:embed="rId2"/>
           <a:stretch>
             <a:fillRect/>
           </a:stretch>
         </p:blipFill>
         <p:spPr>
           <a:xfrm>
-            <a:off x="567543" y="2187127"/>
-            <a:ext cx="4526664" cy="4315274"/>
+            <a:off x="567542" y="2187126"/>
+            <a:ext cx="6849431" cy="2238687"/>
           </a:xfrm>
           <a:prstGeom prst="rect">
             <a:avLst/>
           </a:prstGeom>
         </p:spPr>
       </p:pic>
-      <p:sp>
-        <p:nvSpPr>
-          <p:cNvPr id="5" name="矢印: 右 4">
-            <a:extLst>
-              <a:ext uri="{FF2B5EF4-FFF2-40B4-BE49-F238E27FC236}">
-                <a16:creationId xmlns:a16="http://schemas.microsoft.com/office/drawing/2014/main" id="{D959E5D6-DBBC-4B71-99ED-D0E8FC408370}"/>
-              </a:ext>
-            </a:extLst>
-          </p:cNvPr>
-          <p:cNvSpPr/>
-          <p:nvPr/>
-        </p:nvSpPr>
-        <p:spPr>
-          <a:xfrm rot="13679340">
-            <a:off x="2879197" y="5976592"/>
-            <a:ext cx="817913" cy="711200"/>
-          </a:xfrm>
-          <a:prstGeom prst="rightArrow">
-            <a:avLst/>
-          </a:prstGeom>
-          <a:solidFill>
-            <a:srgbClr val="FF0000"/>
-          </a:solidFill>
-          <a:ln w="38100">
-            <a:solidFill>
-              <a:schemeClr val="tx1"/>
-            </a:solidFill>
-          </a:ln>
-        </p:spPr>
-        <p:style>
-          <a:lnRef idx="2">
-            <a:schemeClr val="accent1">
-              <a:shade val="50000"/>
-            </a:schemeClr>
-          </a:lnRef>
-          <a:fillRef idx="1">
-            <a:schemeClr val="accent1"/>
-          </a:fillRef>
-          <a:effectRef idx="0">
-            <a:schemeClr val="accent1"/>
-          </a:effectRef>
-          <a:fontRef idx="minor">
-            <a:schemeClr val="lt1"/>
-          </a:fontRef>
-        </p:style>
-        <p:txBody>
-          <a:bodyPr rtlCol="0" anchor="ctr"/>
-          <a:lstStyle/>
-          <a:p>
-            <a:pPr algn="ctr"/>
-            <a:endParaRPr kumimoji="1" lang="ja-JP" altLang="en-US"/>
-          </a:p>
-        </p:txBody>
-      </p:sp>
     </p:spTree>
     <p:extLst>
       <p:ext uri="{BB962C8B-B14F-4D97-AF65-F5344CB8AC3E}">
-        <p14:creationId xmlns:p14="http://schemas.microsoft.com/office/powerpoint/2010/main" val="410028988"/>
+        <p14:creationId xmlns:p14="http://schemas.microsoft.com/office/powerpoint/2010/main" val="1026118749"/>
       </p:ext>
     </p:extLst>
   </p:cSld>
@@ -4364,7 +5004,7 @@
         <p:spPr>
           <a:xfrm>
             <a:off x="567542" y="491954"/>
-            <a:ext cx="3199915" cy="584775"/>
+            <a:ext cx="1826141" cy="584775"/>
           </a:xfrm>
           <a:prstGeom prst="rect">
             <a:avLst/>
@@ -4378,12 +5018,8 @@
           <a:lstStyle/>
           <a:p>
             <a:r>
-              <a:rPr kumimoji="1" lang="en-US" altLang="ja-JP" sz="3200" b="1" u="sng" dirty="0"/>
-              <a:t>3D</a:t>
-            </a:r>
-            <a:r>
               <a:rPr kumimoji="1" lang="ja-JP" altLang="en-US" sz="3200" b="1" u="sng" dirty="0"/>
-              <a:t>モデルの作成</a:t>
+              <a:t>戦略処理</a:t>
             </a:r>
             <a:endParaRPr kumimoji="1" lang="en-US" altLang="ja-JP" sz="3200" b="1" u="sng" dirty="0"/>
           </a:p>
@@ -4404,7 +5040,7 @@
         <p:spPr>
           <a:xfrm>
             <a:off x="567542" y="1216429"/>
-            <a:ext cx="9174306" cy="830997"/>
+            <a:ext cx="10410222" cy="461665"/>
           </a:xfrm>
           <a:prstGeom prst="rect">
             <a:avLst/>
@@ -4417,21 +5053,13 @@
           </a:bodyPr>
           <a:lstStyle/>
           <a:p>
-            <a:r>
-              <a:rPr kumimoji="1" lang="ja-JP" altLang="en-US" sz="2400" dirty="0"/>
-              <a:t>右側にあるメニューの</a:t>
-            </a:r>
-            <a:r>
-              <a:rPr lang="ja-JP" altLang="en-US" sz="2400" dirty="0"/>
-              <a:t>「</a:t>
-            </a:r>
             <a:r>
               <a:rPr lang="en-US" altLang="ja-JP" sz="2400" b="1" dirty="0">
                 <a:solidFill>
                   <a:srgbClr val="FF0000"/>
                 </a:solidFill>
               </a:rPr>
-              <a:t>Include</a:t>
+              <a:t>Source</a:t>
             </a:r>
             <a:r>
               <a:rPr lang="ja-JP" altLang="en-US" sz="2400" b="1" dirty="0">
@@ -4439,50 +5067,31 @@
                   <a:srgbClr val="FF0000"/>
                 </a:solidFill>
               </a:rPr>
-              <a:t>　＞　</a:t>
-            </a:r>
-            <a:r>
-              <a:rPr lang="en-US" altLang="ja-JP" sz="2400" b="1" dirty="0" err="1">
+              <a:t>フォルダ</a:t>
+            </a:r>
+            <a:r>
+              <a:rPr lang="ja-JP" altLang="en-US" sz="2400" dirty="0"/>
+              <a:t>の</a:t>
+            </a:r>
+            <a:r>
+              <a:rPr lang="en-US" altLang="ja-JP" sz="2400" b="1" dirty="0">
                 <a:solidFill>
                   <a:srgbClr val="FF0000"/>
                 </a:solidFill>
               </a:rPr>
-              <a:t>ObjectType</a:t>
-            </a:r>
-            <a:r>
-              <a:rPr lang="ja-JP" altLang="en-US" sz="2400" dirty="0"/>
-              <a:t>」の設定を、</a:t>
-            </a:r>
-            <a:endParaRPr lang="en-US" altLang="ja-JP" sz="2400" dirty="0"/>
-          </a:p>
-          <a:p>
-            <a:r>
-              <a:rPr kumimoji="1" lang="en-US" altLang="ja-JP" sz="2400" b="1" dirty="0">
+              <a:t>AI</a:t>
+            </a:r>
+            <a:r>
+              <a:rPr lang="ja-JP" altLang="en-US" sz="2400" b="1" dirty="0">
                 <a:solidFill>
                   <a:srgbClr val="FF0000"/>
                 </a:solidFill>
               </a:rPr>
-              <a:t>Armature</a:t>
-            </a:r>
-            <a:r>
-              <a:rPr kumimoji="1" lang="ja-JP" altLang="en-US" sz="2400" dirty="0"/>
-              <a:t>と</a:t>
-            </a:r>
-            <a:r>
-              <a:rPr kumimoji="1" lang="en-US" altLang="ja-JP" sz="2400" b="1" dirty="0">
-                <a:solidFill>
-                  <a:srgbClr val="FF0000"/>
-                </a:solidFill>
-              </a:rPr>
-              <a:t>Mesh</a:t>
-            </a:r>
-            <a:r>
-              <a:rPr kumimoji="1" lang="ja-JP" altLang="en-US" sz="2400" dirty="0"/>
-              <a:t>だけ選択されている状態にしましょう</a:t>
+              <a:t>フォルダ</a:t>
             </a:r>
             <a:r>
               <a:rPr lang="ja-JP" altLang="en-US" sz="2400" dirty="0"/>
-              <a:t>。</a:t>
+              <a:t>に以下の２つのファイルを追加しましょう。</a:t>
             </a:r>
             <a:endParaRPr kumimoji="1" lang="en-US" altLang="ja-JP" sz="2400" dirty="0"/>
           </a:p>
@@ -4490,10 +5099,10 @@
       </p:sp>
       <p:pic>
         <p:nvPicPr>
-          <p:cNvPr id="5" name="図 4">
-            <a:extLst>
-              <a:ext uri="{FF2B5EF4-FFF2-40B4-BE49-F238E27FC236}">
-                <a16:creationId xmlns:a16="http://schemas.microsoft.com/office/drawing/2014/main" id="{15852968-E080-488D-9F22-0F3E9135DE74}"/>
+          <p:cNvPr id="3" name="図 2">
+            <a:extLst>
+              <a:ext uri="{FF2B5EF4-FFF2-40B4-BE49-F238E27FC236}">
+                <a16:creationId xmlns:a16="http://schemas.microsoft.com/office/drawing/2014/main" id="{D63C19AC-1398-4C75-A31F-7AD3D0262042}"/>
               </a:ext>
             </a:extLst>
           </p:cNvPr>
@@ -4503,21 +5112,15 @@
           <p:nvPr/>
         </p:nvPicPr>
         <p:blipFill>
-          <a:blip r:embed="rId2">
-            <a:extLst>
-              <a:ext uri="{28A0092B-C50C-407E-A947-70E740481C1C}">
-                <a14:useLocalDpi xmlns:a14="http://schemas.microsoft.com/office/drawing/2010/main" val="0"/>
-              </a:ext>
-            </a:extLst>
-          </a:blip>
+          <a:blip r:embed="rId2"/>
           <a:stretch>
             <a:fillRect/>
           </a:stretch>
         </p:blipFill>
         <p:spPr>
           <a:xfrm>
-            <a:off x="567541" y="2556458"/>
-            <a:ext cx="3832807" cy="3971342"/>
+            <a:off x="567541" y="1817793"/>
+            <a:ext cx="3409039" cy="3507241"/>
           </a:xfrm>
           <a:prstGeom prst="rect">
             <a:avLst/>
@@ -4526,55 +5129,60 @@
       </p:pic>
       <p:sp>
         <p:nvSpPr>
-          <p:cNvPr id="7" name="テキスト ボックス 6">
-            <a:extLst>
-              <a:ext uri="{FF2B5EF4-FFF2-40B4-BE49-F238E27FC236}">
-                <a16:creationId xmlns:a16="http://schemas.microsoft.com/office/drawing/2014/main" id="{34DEF125-BAD3-4E9C-958E-2B42953AA485}"/>
-              </a:ext>
-            </a:extLst>
-          </p:cNvPr>
-          <p:cNvSpPr txBox="1"/>
+          <p:cNvPr id="7" name="正方形/長方形 6">
+            <a:extLst>
+              <a:ext uri="{FF2B5EF4-FFF2-40B4-BE49-F238E27FC236}">
+                <a16:creationId xmlns:a16="http://schemas.microsoft.com/office/drawing/2014/main" id="{2D38293A-418E-4821-AF48-56C5F70D01A7}"/>
+              </a:ext>
+            </a:extLst>
+          </p:cNvPr>
+          <p:cNvSpPr/>
           <p:nvPr/>
         </p:nvSpPr>
         <p:spPr>
           <a:xfrm>
-            <a:off x="4400348" y="5696803"/>
-            <a:ext cx="5468164" cy="830997"/>
+            <a:off x="654424" y="3571413"/>
+            <a:ext cx="2151529" cy="995082"/>
           </a:xfrm>
           <a:prstGeom prst="rect">
             <a:avLst/>
           </a:prstGeom>
           <a:noFill/>
-        </p:spPr>
-        <p:txBody>
-          <a:bodyPr wrap="none" rtlCol="0">
-            <a:spAutoFit/>
-          </a:bodyPr>
-          <a:lstStyle/>
-          <a:p>
-            <a:r>
-              <a:rPr kumimoji="1" lang="en-US" altLang="ja-JP" sz="2400" dirty="0"/>
-              <a:t>Shift</a:t>
-            </a:r>
-            <a:r>
-              <a:rPr kumimoji="1" lang="ja-JP" altLang="en-US" sz="2400" dirty="0"/>
-              <a:t>キーを押しながらクリックすると</a:t>
-            </a:r>
-            <a:endParaRPr kumimoji="1" lang="en-US" altLang="ja-JP" sz="2400" dirty="0"/>
-          </a:p>
-          <a:p>
-            <a:r>
-              <a:rPr kumimoji="1" lang="ja-JP" altLang="en-US" sz="2400" dirty="0"/>
-              <a:t>複数選択できます</a:t>
-            </a:r>
-            <a:endParaRPr kumimoji="1" lang="en-US" altLang="ja-JP" sz="2400" dirty="0"/>
+          <a:ln w="38100">
+            <a:solidFill>
+              <a:srgbClr val="FF0000"/>
+            </a:solidFill>
+          </a:ln>
+        </p:spPr>
+        <p:style>
+          <a:lnRef idx="2">
+            <a:schemeClr val="accent1">
+              <a:shade val="50000"/>
+            </a:schemeClr>
+          </a:lnRef>
+          <a:fillRef idx="1">
+            <a:schemeClr val="accent1"/>
+          </a:fillRef>
+          <a:effectRef idx="0">
+            <a:schemeClr val="accent1"/>
+          </a:effectRef>
+          <a:fontRef idx="minor">
+            <a:schemeClr val="lt1"/>
+          </a:fontRef>
+        </p:style>
+        <p:txBody>
+          <a:bodyPr rtlCol="0" anchor="ctr"/>
+          <a:lstStyle/>
+          <a:p>
+            <a:pPr algn="ctr"/>
+            <a:endParaRPr kumimoji="1" lang="ja-JP" altLang="en-US"/>
           </a:p>
         </p:txBody>
       </p:sp>
     </p:spTree>
     <p:extLst>
       <p:ext uri="{BB962C8B-B14F-4D97-AF65-F5344CB8AC3E}">
-        <p14:creationId xmlns:p14="http://schemas.microsoft.com/office/powerpoint/2010/main" val="2175188753"/>
+        <p14:creationId xmlns:p14="http://schemas.microsoft.com/office/powerpoint/2010/main" val="4067363475"/>
       </p:ext>
     </p:extLst>
   </p:cSld>
@@ -4616,7 +5224,7 @@
         <p:spPr>
           <a:xfrm>
             <a:off x="567542" y="491954"/>
-            <a:ext cx="3199915" cy="584775"/>
+            <a:ext cx="1826141" cy="584775"/>
           </a:xfrm>
           <a:prstGeom prst="rect">
             <a:avLst/>
@@ -4630,12 +5238,8 @@
           <a:lstStyle/>
           <a:p>
             <a:r>
-              <a:rPr kumimoji="1" lang="en-US" altLang="ja-JP" sz="3200" b="1" u="sng" dirty="0"/>
-              <a:t>3D</a:t>
-            </a:r>
-            <a:r>
               <a:rPr kumimoji="1" lang="ja-JP" altLang="en-US" sz="3200" b="1" u="sng" dirty="0"/>
-              <a:t>モデルの作成</a:t>
+              <a:t>戦略処理</a:t>
             </a:r>
             <a:endParaRPr kumimoji="1" lang="en-US" altLang="ja-JP" sz="3200" b="1" u="sng" dirty="0"/>
           </a:p>
@@ -4656,7 +5260,7 @@
         <p:spPr>
           <a:xfrm>
             <a:off x="567542" y="1216429"/>
-            <a:ext cx="9999853" cy="830997"/>
+            <a:ext cx="3935693" cy="461665"/>
           </a:xfrm>
           <a:prstGeom prst="rect">
             <a:avLst/>
@@ -4669,116 +5273,17 @@
           </a:bodyPr>
           <a:lstStyle/>
           <a:p>
-            <a:r>
-              <a:rPr kumimoji="1" lang="ja-JP" altLang="en-US" sz="2400" dirty="0"/>
-              <a:t>右側にあるメニューの</a:t>
-            </a:r>
-            <a:r>
-              <a:rPr lang="ja-JP" altLang="en-US" sz="2400" dirty="0"/>
-              <a:t>「</a:t>
-            </a:r>
-            <a:r>
-              <a:rPr lang="en-US" altLang="ja-JP" sz="2400" b="1" dirty="0">
-                <a:solidFill>
-                  <a:srgbClr val="FF0000"/>
-                </a:solidFill>
-              </a:rPr>
-              <a:t>Transform</a:t>
-            </a:r>
-            <a:r>
-              <a:rPr lang="ja-JP" altLang="en-US" sz="2400" b="1" dirty="0">
-                <a:solidFill>
-                  <a:srgbClr val="FF0000"/>
-                </a:solidFill>
-              </a:rPr>
-              <a:t>　＞　</a:t>
-            </a:r>
             <a:r>
               <a:rPr lang="en-US" altLang="ja-JP" sz="2400" b="1" dirty="0" err="1">
                 <a:solidFill>
                   <a:srgbClr val="FF0000"/>
                 </a:solidFill>
               </a:rPr>
-              <a:t>ApplyScalings</a:t>
+              <a:t>AIPlayCPU.h</a:t>
             </a:r>
             <a:r>
               <a:rPr lang="ja-JP" altLang="en-US" sz="2400" dirty="0"/>
-              <a:t>」の設定を、</a:t>
-            </a:r>
-            <a:endParaRPr lang="en-US" altLang="ja-JP" sz="2400" dirty="0"/>
-          </a:p>
-          <a:p>
-            <a:r>
-              <a:rPr kumimoji="1" lang="ja-JP" altLang="en-US" sz="2400" b="1" dirty="0">
-                <a:solidFill>
-                  <a:srgbClr val="FF0000"/>
-                </a:solidFill>
-              </a:rPr>
-              <a:t>「</a:t>
-            </a:r>
-            <a:r>
-              <a:rPr kumimoji="1" lang="en-US" altLang="ja-JP" sz="2400" b="1" dirty="0">
-                <a:solidFill>
-                  <a:srgbClr val="FF0000"/>
-                </a:solidFill>
-              </a:rPr>
-              <a:t>FBX Units Scale</a:t>
-            </a:r>
-            <a:r>
-              <a:rPr kumimoji="1" lang="ja-JP" altLang="en-US" sz="2400" b="1" dirty="0">
-                <a:solidFill>
-                  <a:srgbClr val="FF0000"/>
-                </a:solidFill>
-              </a:rPr>
-              <a:t>」</a:t>
-            </a:r>
-            <a:r>
-              <a:rPr kumimoji="1" lang="ja-JP" altLang="en-US" sz="2400" dirty="0"/>
-              <a:t>に設定しましょう。</a:t>
-            </a:r>
-            <a:endParaRPr kumimoji="1" lang="en-US" altLang="ja-JP" sz="2400" dirty="0"/>
-          </a:p>
-        </p:txBody>
-      </p:sp>
-      <p:sp>
-        <p:nvSpPr>
-          <p:cNvPr id="9" name="テキスト ボックス 8">
-            <a:extLst>
-              <a:ext uri="{FF2B5EF4-FFF2-40B4-BE49-F238E27FC236}">
-                <a16:creationId xmlns:a16="http://schemas.microsoft.com/office/drawing/2014/main" id="{195A4FFA-B6D4-48E4-A135-A36FA0DA78C3}"/>
-              </a:ext>
-            </a:extLst>
-          </p:cNvPr>
-          <p:cNvSpPr txBox="1"/>
-          <p:nvPr/>
-        </p:nvSpPr>
-        <p:spPr>
-          <a:xfrm>
-            <a:off x="567542" y="5514526"/>
-            <a:ext cx="5715026" cy="461665"/>
-          </a:xfrm>
-          <a:prstGeom prst="rect">
-            <a:avLst/>
-          </a:prstGeom>
-          <a:noFill/>
-        </p:spPr>
-        <p:txBody>
-          <a:bodyPr wrap="none" rtlCol="0">
-            <a:spAutoFit/>
-          </a:bodyPr>
-          <a:lstStyle/>
-          <a:p>
-            <a:r>
-              <a:rPr kumimoji="1" lang="ja-JP" altLang="en-US" sz="2400" dirty="0"/>
-              <a:t>ここまで設定したら</a:t>
-            </a:r>
-            <a:r>
-              <a:rPr kumimoji="1" lang="en-US" altLang="ja-JP" sz="2400" dirty="0"/>
-              <a:t>Export</a:t>
-            </a:r>
-            <a:r>
-              <a:rPr kumimoji="1" lang="ja-JP" altLang="en-US" sz="2400" dirty="0"/>
-              <a:t>しましょう！</a:t>
+              <a:t>を書きます。</a:t>
             </a:r>
             <a:endParaRPr kumimoji="1" lang="en-US" altLang="ja-JP" sz="2400" dirty="0"/>
           </a:p>
@@ -4789,7 +5294,7 @@
           <p:cNvPr id="5" name="図 4">
             <a:extLst>
               <a:ext uri="{FF2B5EF4-FFF2-40B4-BE49-F238E27FC236}">
-                <a16:creationId xmlns:a16="http://schemas.microsoft.com/office/drawing/2014/main" id="{7AC0A771-27A0-4480-B9D9-8526FFBA9DEA}"/>
+                <a16:creationId xmlns:a16="http://schemas.microsoft.com/office/drawing/2014/main" id="{0329B83C-994C-4F2B-9F92-C20B7F4DF796}"/>
               </a:ext>
             </a:extLst>
           </p:cNvPr>
@@ -4806,72 +5311,18 @@
         </p:blipFill>
         <p:spPr>
           <a:xfrm>
-            <a:off x="567541" y="2187126"/>
-            <a:ext cx="3665597" cy="3062207"/>
+            <a:off x="567542" y="1817795"/>
+            <a:ext cx="7298832" cy="4681618"/>
           </a:xfrm>
           <a:prstGeom prst="rect">
             <a:avLst/>
           </a:prstGeom>
         </p:spPr>
       </p:pic>
-      <p:sp>
-        <p:nvSpPr>
-          <p:cNvPr id="10" name="矢印: 右 9">
-            <a:extLst>
-              <a:ext uri="{FF2B5EF4-FFF2-40B4-BE49-F238E27FC236}">
-                <a16:creationId xmlns:a16="http://schemas.microsoft.com/office/drawing/2014/main" id="{CFAE88F2-19A9-40AB-B18B-5B214427BAB9}"/>
-              </a:ext>
-            </a:extLst>
-          </p:cNvPr>
-          <p:cNvSpPr/>
-          <p:nvPr/>
-        </p:nvSpPr>
-        <p:spPr>
-          <a:xfrm rot="13679340">
-            <a:off x="3358500" y="3271491"/>
-            <a:ext cx="817913" cy="711200"/>
-          </a:xfrm>
-          <a:prstGeom prst="rightArrow">
-            <a:avLst/>
-          </a:prstGeom>
-          <a:solidFill>
-            <a:srgbClr val="FF0000"/>
-          </a:solidFill>
-          <a:ln w="38100">
-            <a:solidFill>
-              <a:schemeClr val="tx1"/>
-            </a:solidFill>
-          </a:ln>
-        </p:spPr>
-        <p:style>
-          <a:lnRef idx="2">
-            <a:schemeClr val="accent1">
-              <a:shade val="50000"/>
-            </a:schemeClr>
-          </a:lnRef>
-          <a:fillRef idx="1">
-            <a:schemeClr val="accent1"/>
-          </a:fillRef>
-          <a:effectRef idx="0">
-            <a:schemeClr val="accent1"/>
-          </a:effectRef>
-          <a:fontRef idx="minor">
-            <a:schemeClr val="lt1"/>
-          </a:fontRef>
-        </p:style>
-        <p:txBody>
-          <a:bodyPr rtlCol="0" anchor="ctr"/>
-          <a:lstStyle/>
-          <a:p>
-            <a:pPr algn="ctr"/>
-            <a:endParaRPr kumimoji="1" lang="ja-JP" altLang="en-US"/>
-          </a:p>
-        </p:txBody>
-      </p:sp>
     </p:spTree>
     <p:extLst>
       <p:ext uri="{BB962C8B-B14F-4D97-AF65-F5344CB8AC3E}">
-        <p14:creationId xmlns:p14="http://schemas.microsoft.com/office/powerpoint/2010/main" val="575447541"/>
+        <p14:creationId xmlns:p14="http://schemas.microsoft.com/office/powerpoint/2010/main" val="2990859623"/>
       </p:ext>
     </p:extLst>
   </p:cSld>
@@ -4913,7 +5364,7 @@
         <p:spPr>
           <a:xfrm>
             <a:off x="567542" y="491954"/>
-            <a:ext cx="3199915" cy="584775"/>
+            <a:ext cx="1826141" cy="584775"/>
           </a:xfrm>
           <a:prstGeom prst="rect">
             <a:avLst/>
@@ -4927,12 +5378,8 @@
           <a:lstStyle/>
           <a:p>
             <a:r>
-              <a:rPr kumimoji="1" lang="en-US" altLang="ja-JP" sz="3200" b="1" u="sng" dirty="0"/>
-              <a:t>3D</a:t>
-            </a:r>
-            <a:r>
               <a:rPr kumimoji="1" lang="ja-JP" altLang="en-US" sz="3200" b="1" u="sng" dirty="0"/>
-              <a:t>モデルの作成</a:t>
+              <a:t>戦略処理</a:t>
             </a:r>
             <a:endParaRPr kumimoji="1" lang="en-US" altLang="ja-JP" sz="3200" b="1" u="sng" dirty="0"/>
           </a:p>
@@ -4953,7 +5400,7 @@
         <p:spPr>
           <a:xfrm>
             <a:off x="567542" y="1216429"/>
-            <a:ext cx="8852103" cy="1200329"/>
+            <a:ext cx="5832046" cy="461665"/>
           </a:xfrm>
           <a:prstGeom prst="rect">
             <a:avLst/>
@@ -4966,110 +5413,28 @@
           </a:bodyPr>
           <a:lstStyle/>
           <a:p>
-            <a:r>
-              <a:rPr kumimoji="1" lang="ja-JP" altLang="en-US" sz="2400" dirty="0"/>
-              <a:t>続いて</a:t>
-            </a:r>
-            <a:r>
-              <a:rPr kumimoji="1" lang="en-US" altLang="ja-JP" sz="2400" dirty="0"/>
-              <a:t>FBX</a:t>
-            </a:r>
-            <a:r>
-              <a:rPr kumimoji="1" lang="ja-JP" altLang="en-US" sz="2400" dirty="0"/>
-              <a:t>を</a:t>
-            </a:r>
-            <a:r>
-              <a:rPr kumimoji="1" lang="en-US" altLang="ja-JP" sz="2400" dirty="0" err="1"/>
-              <a:t>Dxlib</a:t>
-            </a:r>
-            <a:r>
-              <a:rPr kumimoji="1" lang="ja-JP" altLang="en-US" sz="2400" dirty="0"/>
-              <a:t>でも使える</a:t>
-            </a:r>
-            <a:r>
-              <a:rPr kumimoji="1" lang="en-US" altLang="ja-JP" sz="2400" b="1" dirty="0">
-                <a:solidFill>
-                  <a:srgbClr val="FF0000"/>
-                </a:solidFill>
-              </a:rPr>
-              <a:t>X</a:t>
-            </a:r>
-            <a:r>
-              <a:rPr kumimoji="1" lang="ja-JP" altLang="en-US" sz="2400" b="1" dirty="0">
-                <a:solidFill>
-                  <a:srgbClr val="FF0000"/>
-                </a:solidFill>
-              </a:rPr>
-              <a:t>ファイルに変換</a:t>
-            </a:r>
-            <a:r>
-              <a:rPr kumimoji="1" lang="ja-JP" altLang="en-US" sz="2400" dirty="0"/>
-              <a:t>します。</a:t>
-            </a:r>
-            <a:endParaRPr kumimoji="1" lang="en-US" altLang="ja-JP" sz="2400" dirty="0"/>
-          </a:p>
-          <a:p>
-            <a:r>
-              <a:rPr lang="ja-JP" altLang="en-US" sz="2400" dirty="0"/>
-              <a:t>まずは「</a:t>
-            </a:r>
-            <a:r>
-              <a:rPr lang="en-US" altLang="ja-JP" sz="2400" b="1" dirty="0" err="1">
-                <a:solidFill>
-                  <a:srgbClr val="FF0000"/>
-                </a:solidFill>
-              </a:rPr>
-              <a:t>DxLib_VC</a:t>
-            </a:r>
             <a:r>
               <a:rPr lang="en-US" altLang="ja-JP" sz="2400" b="1" dirty="0">
                 <a:solidFill>
                   <a:srgbClr val="FF0000"/>
                 </a:solidFill>
               </a:rPr>
-              <a:t>\Tool\</a:t>
-            </a:r>
-            <a:r>
-              <a:rPr lang="en-US" altLang="ja-JP" sz="2400" b="1" dirty="0" err="1">
-                <a:solidFill>
-                  <a:srgbClr val="FF0000"/>
-                </a:solidFill>
-              </a:rPr>
-              <a:t>DxLibModelViewer</a:t>
+              <a:t>AIPlayCPU.cpp</a:t>
             </a:r>
             <a:r>
               <a:rPr lang="ja-JP" altLang="en-US" sz="2400" dirty="0"/>
-              <a:t>」にある、</a:t>
+              <a:t>を書きます。（その１）</a:t>
             </a:r>
             <a:endParaRPr lang="en-US" altLang="ja-JP" sz="2400" dirty="0"/>
-          </a:p>
-          <a:p>
-            <a:r>
-              <a:rPr kumimoji="1" lang="ja-JP" altLang="en-US" sz="2400" dirty="0"/>
-              <a:t>「</a:t>
-            </a:r>
-            <a:r>
-              <a:rPr kumimoji="1" lang="en-US" altLang="ja-JP" sz="2400" b="1" dirty="0">
-                <a:solidFill>
-                  <a:srgbClr val="FF0000"/>
-                </a:solidFill>
-              </a:rPr>
-              <a:t>DxLibModelViewer_64bit.exe</a:t>
-            </a:r>
-            <a:r>
-              <a:rPr kumimoji="1" lang="ja-JP" altLang="en-US" sz="2400" dirty="0"/>
-              <a:t>」というツールを開きます。</a:t>
-            </a:r>
-            <a:endParaRPr kumimoji="1" lang="en-US" altLang="ja-JP" sz="2400" dirty="0"/>
           </a:p>
         </p:txBody>
       </p:sp>
       <p:pic>
         <p:nvPicPr>
-          <p:cNvPr id="5" name="図 4">
-            <a:extLst>
-              <a:ext uri="{FF2B5EF4-FFF2-40B4-BE49-F238E27FC236}">
-                <a16:creationId xmlns:a16="http://schemas.microsoft.com/office/drawing/2014/main" id="{7656A013-993B-4527-9721-CEC8F2709B5E}"/>
+          <p:cNvPr id="3" name="図 2">
+            <a:extLst>
+              <a:ext uri="{FF2B5EF4-FFF2-40B4-BE49-F238E27FC236}">
+                <a16:creationId xmlns:a16="http://schemas.microsoft.com/office/drawing/2014/main" id="{CFD9EA0E-B777-4F65-AB34-CE872DAF3C3E}"/>
               </a:ext>
             </a:extLst>
           </p:cNvPr>
@@ -5079,21 +5444,15 @@
           <p:nvPr/>
         </p:nvPicPr>
         <p:blipFill>
-          <a:blip r:embed="rId2">
-            <a:extLst>
-              <a:ext uri="{28A0092B-C50C-407E-A947-70E740481C1C}">
-                <a14:useLocalDpi xmlns:a14="http://schemas.microsoft.com/office/drawing/2010/main" val="0"/>
-              </a:ext>
-            </a:extLst>
-          </a:blip>
+          <a:blip r:embed="rId2"/>
           <a:stretch>
             <a:fillRect/>
           </a:stretch>
         </p:blipFill>
         <p:spPr>
           <a:xfrm>
-            <a:off x="567542" y="2556458"/>
-            <a:ext cx="7839858" cy="3890676"/>
+            <a:off x="567542" y="1817794"/>
+            <a:ext cx="7957893" cy="4683147"/>
           </a:xfrm>
           <a:prstGeom prst="rect">
             <a:avLst/>
@@ -5103,7 +5462,7 @@
     </p:spTree>
     <p:extLst>
       <p:ext uri="{BB962C8B-B14F-4D97-AF65-F5344CB8AC3E}">
-        <p14:creationId xmlns:p14="http://schemas.microsoft.com/office/powerpoint/2010/main" val="727988672"/>
+        <p14:creationId xmlns:p14="http://schemas.microsoft.com/office/powerpoint/2010/main" val="2078514123"/>
       </p:ext>
     </p:extLst>
   </p:cSld>
@@ -5145,7 +5504,7 @@
         <p:spPr>
           <a:xfrm>
             <a:off x="567542" y="491954"/>
-            <a:ext cx="3199915" cy="584775"/>
+            <a:ext cx="1826141" cy="584775"/>
           </a:xfrm>
           <a:prstGeom prst="rect">
             <a:avLst/>
@@ -5159,12 +5518,8 @@
           <a:lstStyle/>
           <a:p>
             <a:r>
-              <a:rPr kumimoji="1" lang="en-US" altLang="ja-JP" sz="3200" b="1" u="sng" dirty="0"/>
-              <a:t>3D</a:t>
-            </a:r>
-            <a:r>
               <a:rPr kumimoji="1" lang="ja-JP" altLang="en-US" sz="3200" b="1" u="sng" dirty="0"/>
-              <a:t>モデルの作成</a:t>
+              <a:t>戦略処理</a:t>
             </a:r>
             <a:endParaRPr kumimoji="1" lang="en-US" altLang="ja-JP" sz="3200" b="1" u="sng" dirty="0"/>
           </a:p>
@@ -5185,7 +5540,7 @@
         <p:spPr>
           <a:xfrm>
             <a:off x="567542" y="1216429"/>
-            <a:ext cx="9089348" cy="461665"/>
+            <a:ext cx="5832046" cy="461665"/>
           </a:xfrm>
           <a:prstGeom prst="rect">
             <a:avLst/>
@@ -5199,27 +5554,27 @@
           <a:lstStyle/>
           <a:p>
             <a:r>
-              <a:rPr kumimoji="1" lang="ja-JP" altLang="en-US" sz="2400" dirty="0"/>
-              <a:t>出力した</a:t>
-            </a:r>
-            <a:r>
-              <a:rPr kumimoji="1" lang="en-US" altLang="ja-JP" sz="2400" dirty="0"/>
-              <a:t>FBX</a:t>
-            </a:r>
-            <a:r>
-              <a:rPr kumimoji="1" lang="ja-JP" altLang="en-US" sz="2400" dirty="0"/>
-              <a:t>を画面上にドラッグアンドドロップして開きます。</a:t>
-            </a:r>
-            <a:endParaRPr kumimoji="1" lang="en-US" altLang="ja-JP" sz="2400" dirty="0"/>
+              <a:rPr lang="en-US" altLang="ja-JP" sz="2400" b="1" dirty="0">
+                <a:solidFill>
+                  <a:srgbClr val="FF0000"/>
+                </a:solidFill>
+              </a:rPr>
+              <a:t>AIPlayCPU.cpp</a:t>
+            </a:r>
+            <a:r>
+              <a:rPr lang="ja-JP" altLang="en-US" sz="2400" dirty="0"/>
+              <a:t>を書きます。（その２）</a:t>
+            </a:r>
+            <a:endParaRPr lang="en-US" altLang="ja-JP" sz="2400" dirty="0"/>
           </a:p>
         </p:txBody>
       </p:sp>
       <p:pic>
         <p:nvPicPr>
-          <p:cNvPr id="3" name="図 2">
-            <a:extLst>
-              <a:ext uri="{FF2B5EF4-FFF2-40B4-BE49-F238E27FC236}">
-                <a16:creationId xmlns:a16="http://schemas.microsoft.com/office/drawing/2014/main" id="{38A58C5A-D4FD-4A66-B461-2ABD1CB1CDC2}"/>
+          <p:cNvPr id="5" name="図 4">
+            <a:extLst>
+              <a:ext uri="{FF2B5EF4-FFF2-40B4-BE49-F238E27FC236}">
+                <a16:creationId xmlns:a16="http://schemas.microsoft.com/office/drawing/2014/main" id="{B783D130-77FA-42A8-8DBF-646B57A0D128}"/>
               </a:ext>
             </a:extLst>
           </p:cNvPr>
@@ -5229,21 +5584,15 @@
           <p:nvPr/>
         </p:nvPicPr>
         <p:blipFill>
-          <a:blip r:embed="rId2">
-            <a:extLst>
-              <a:ext uri="{28A0092B-C50C-407E-A947-70E740481C1C}">
-                <a14:useLocalDpi xmlns:a14="http://schemas.microsoft.com/office/drawing/2010/main" val="0"/>
-              </a:ext>
-            </a:extLst>
-          </a:blip>
+          <a:blip r:embed="rId2"/>
           <a:stretch>
             <a:fillRect/>
           </a:stretch>
         </p:blipFill>
         <p:spPr>
           <a:xfrm>
-            <a:off x="567542" y="1817794"/>
-            <a:ext cx="9249558" cy="4624779"/>
+            <a:off x="567542" y="1817795"/>
+            <a:ext cx="6172227" cy="4654724"/>
           </a:xfrm>
           <a:prstGeom prst="rect">
             <a:avLst/>
@@ -5253,7 +5602,7 @@
     </p:spTree>
     <p:extLst>
       <p:ext uri="{BB962C8B-B14F-4D97-AF65-F5344CB8AC3E}">
-        <p14:creationId xmlns:p14="http://schemas.microsoft.com/office/powerpoint/2010/main" val="2010799776"/>
+        <p14:creationId xmlns:p14="http://schemas.microsoft.com/office/powerpoint/2010/main" val="1627333653"/>
       </p:ext>
     </p:extLst>
   </p:cSld>
@@ -5295,7 +5644,7 @@
         <p:spPr>
           <a:xfrm>
             <a:off x="567542" y="491954"/>
-            <a:ext cx="3199915" cy="584775"/>
+            <a:ext cx="1826141" cy="584775"/>
           </a:xfrm>
           <a:prstGeom prst="rect">
             <a:avLst/>
@@ -5309,12 +5658,8 @@
           <a:lstStyle/>
           <a:p>
             <a:r>
-              <a:rPr kumimoji="1" lang="en-US" altLang="ja-JP" sz="3200" b="1" u="sng" dirty="0"/>
-              <a:t>3D</a:t>
-            </a:r>
-            <a:r>
               <a:rPr kumimoji="1" lang="ja-JP" altLang="en-US" sz="3200" b="1" u="sng" dirty="0"/>
-              <a:t>モデルの作成</a:t>
+              <a:t>戦略処理</a:t>
             </a:r>
             <a:endParaRPr kumimoji="1" lang="en-US" altLang="ja-JP" sz="3200" b="1" u="sng" dirty="0"/>
           </a:p>
@@ -5335,7 +5680,7 @@
         <p:spPr>
           <a:xfrm>
             <a:off x="567542" y="1216429"/>
-            <a:ext cx="8802410" cy="1200329"/>
+            <a:ext cx="5832046" cy="461665"/>
           </a:xfrm>
           <a:prstGeom prst="rect">
             <a:avLst/>
@@ -5349,46 +5694,16 @@
           <a:lstStyle/>
           <a:p>
             <a:r>
-              <a:rPr kumimoji="1" lang="ja-JP" altLang="en-US" sz="2400" dirty="0"/>
-              <a:t>作ったモデルが暗い場合は、</a:t>
-            </a:r>
-            <a:endParaRPr kumimoji="1" lang="en-US" altLang="ja-JP" sz="2400" dirty="0"/>
-          </a:p>
-          <a:p>
-            <a:r>
-              <a:rPr lang="ja-JP" altLang="en-US" sz="2400" dirty="0"/>
-              <a:t>「</a:t>
-            </a:r>
-            <a:r>
-              <a:rPr lang="ja-JP" altLang="en-US" sz="2400" b="1" dirty="0">
+              <a:rPr lang="en-US" altLang="ja-JP" sz="2400" b="1" dirty="0">
                 <a:solidFill>
                   <a:srgbClr val="FF0000"/>
                 </a:solidFill>
               </a:rPr>
-              <a:t>マテリアル　＞　自己発光　＞　輝度</a:t>
+              <a:t>AIPlayCPU.cpp</a:t>
             </a:r>
             <a:r>
               <a:rPr lang="ja-JP" altLang="en-US" sz="2400" dirty="0"/>
-              <a:t>」から調節できます。</a:t>
-            </a:r>
-            <a:endParaRPr lang="en-US" altLang="ja-JP" sz="2400" dirty="0"/>
-          </a:p>
-          <a:p>
-            <a:r>
-              <a:rPr lang="ja-JP" altLang="en-US" sz="2400" dirty="0"/>
-              <a:t>　　　　　　　　（</a:t>
-            </a:r>
-            <a:r>
-              <a:rPr lang="en-US" altLang="ja-JP" sz="2400" dirty="0"/>
-              <a:t>0.5</a:t>
-            </a:r>
-            <a:r>
-              <a:rPr lang="ja-JP" altLang="en-US" sz="2400" dirty="0"/>
-              <a:t>くらい</a:t>
-            </a:r>
-            <a:r>
-              <a:rPr lang="ja-JP" altLang="en-US" sz="2400"/>
-              <a:t>がちょうど良さそう）</a:t>
+              <a:t>を書きます。（その３）</a:t>
             </a:r>
             <a:endParaRPr lang="en-US" altLang="ja-JP" sz="2400" dirty="0"/>
           </a:p>
@@ -5396,10 +5711,10 @@
       </p:sp>
       <p:pic>
         <p:nvPicPr>
-          <p:cNvPr id="5" name="図 4">
-            <a:extLst>
-              <a:ext uri="{FF2B5EF4-FFF2-40B4-BE49-F238E27FC236}">
-                <a16:creationId xmlns:a16="http://schemas.microsoft.com/office/drawing/2014/main" id="{4C10B004-E591-4042-929D-EBA2DC4D2669}"/>
+          <p:cNvPr id="3" name="図 2">
+            <a:extLst>
+              <a:ext uri="{FF2B5EF4-FFF2-40B4-BE49-F238E27FC236}">
+                <a16:creationId xmlns:a16="http://schemas.microsoft.com/office/drawing/2014/main" id="{9458B1F8-B0D8-4FEB-BA4B-7812557C8B12}"/>
               </a:ext>
             </a:extLst>
           </p:cNvPr>
@@ -5409,247 +5724,25 @@
           <p:nvPr/>
         </p:nvPicPr>
         <p:blipFill>
-          <a:blip r:embed="rId2">
-            <a:extLst>
-              <a:ext uri="{28A0092B-C50C-407E-A947-70E740481C1C}">
-                <a14:useLocalDpi xmlns:a14="http://schemas.microsoft.com/office/drawing/2010/main" val="0"/>
-              </a:ext>
-            </a:extLst>
-          </a:blip>
+          <a:blip r:embed="rId2"/>
           <a:stretch>
             <a:fillRect/>
           </a:stretch>
         </p:blipFill>
         <p:spPr>
           <a:xfrm>
-            <a:off x="567542" y="2187126"/>
-            <a:ext cx="2061384" cy="4327974"/>
+            <a:off x="567543" y="1817794"/>
+            <a:ext cx="6538530" cy="4548252"/>
           </a:xfrm>
           <a:prstGeom prst="rect">
             <a:avLst/>
           </a:prstGeom>
         </p:spPr>
       </p:pic>
-      <p:sp>
-        <p:nvSpPr>
-          <p:cNvPr id="7" name="矢印: 右 6">
-            <a:extLst>
-              <a:ext uri="{FF2B5EF4-FFF2-40B4-BE49-F238E27FC236}">
-                <a16:creationId xmlns:a16="http://schemas.microsoft.com/office/drawing/2014/main" id="{C3D4BA63-DAF1-4317-ACF8-0FE41BC3A96F}"/>
-              </a:ext>
-            </a:extLst>
-          </p:cNvPr>
-          <p:cNvSpPr/>
-          <p:nvPr/>
-        </p:nvSpPr>
-        <p:spPr>
-          <a:xfrm rot="13679340">
-            <a:off x="1477918" y="2547382"/>
-            <a:ext cx="501301" cy="382630"/>
-          </a:xfrm>
-          <a:prstGeom prst="rightArrow">
-            <a:avLst/>
-          </a:prstGeom>
-          <a:solidFill>
-            <a:srgbClr val="FF0000"/>
-          </a:solidFill>
-          <a:ln w="38100">
-            <a:solidFill>
-              <a:schemeClr val="tx1"/>
-            </a:solidFill>
-          </a:ln>
-        </p:spPr>
-        <p:style>
-          <a:lnRef idx="2">
-            <a:schemeClr val="accent1">
-              <a:shade val="50000"/>
-            </a:schemeClr>
-          </a:lnRef>
-          <a:fillRef idx="1">
-            <a:schemeClr val="accent1"/>
-          </a:fillRef>
-          <a:effectRef idx="0">
-            <a:schemeClr val="accent1"/>
-          </a:effectRef>
-          <a:fontRef idx="minor">
-            <a:schemeClr val="lt1"/>
-          </a:fontRef>
-        </p:style>
-        <p:txBody>
-          <a:bodyPr rtlCol="0" anchor="ctr"/>
-          <a:lstStyle/>
-          <a:p>
-            <a:pPr algn="ctr"/>
-            <a:endParaRPr kumimoji="1" lang="ja-JP" altLang="en-US"/>
-          </a:p>
-        </p:txBody>
-      </p:sp>
-      <p:sp>
-        <p:nvSpPr>
-          <p:cNvPr id="9" name="矢印: 右 8">
-            <a:extLst>
-              <a:ext uri="{FF2B5EF4-FFF2-40B4-BE49-F238E27FC236}">
-                <a16:creationId xmlns:a16="http://schemas.microsoft.com/office/drawing/2014/main" id="{B1341922-F535-4DA8-B2B1-E14C856EC414}"/>
-              </a:ext>
-            </a:extLst>
-          </p:cNvPr>
-          <p:cNvSpPr/>
-          <p:nvPr/>
-        </p:nvSpPr>
-        <p:spPr>
-          <a:xfrm rot="13679340">
-            <a:off x="742451" y="2708172"/>
-            <a:ext cx="501301" cy="382630"/>
-          </a:xfrm>
-          <a:prstGeom prst="rightArrow">
-            <a:avLst/>
-          </a:prstGeom>
-          <a:solidFill>
-            <a:srgbClr val="FF0000"/>
-          </a:solidFill>
-          <a:ln w="38100">
-            <a:solidFill>
-              <a:schemeClr val="tx1"/>
-            </a:solidFill>
-          </a:ln>
-        </p:spPr>
-        <p:style>
-          <a:lnRef idx="2">
-            <a:schemeClr val="accent1">
-              <a:shade val="50000"/>
-            </a:schemeClr>
-          </a:lnRef>
-          <a:fillRef idx="1">
-            <a:schemeClr val="accent1"/>
-          </a:fillRef>
-          <a:effectRef idx="0">
-            <a:schemeClr val="accent1"/>
-          </a:effectRef>
-          <a:fontRef idx="minor">
-            <a:schemeClr val="lt1"/>
-          </a:fontRef>
-        </p:style>
-        <p:txBody>
-          <a:bodyPr rtlCol="0" anchor="ctr"/>
-          <a:lstStyle/>
-          <a:p>
-            <a:pPr algn="ctr"/>
-            <a:endParaRPr kumimoji="1" lang="ja-JP" altLang="en-US"/>
-          </a:p>
-        </p:txBody>
-      </p:sp>
-      <p:sp>
-        <p:nvSpPr>
-          <p:cNvPr id="10" name="矢印: 右 9">
-            <a:extLst>
-              <a:ext uri="{FF2B5EF4-FFF2-40B4-BE49-F238E27FC236}">
-                <a16:creationId xmlns:a16="http://schemas.microsoft.com/office/drawing/2014/main" id="{726CCE82-E5CF-44AC-BA70-804B6F3BCF78}"/>
-              </a:ext>
-            </a:extLst>
-          </p:cNvPr>
-          <p:cNvSpPr/>
-          <p:nvPr/>
-        </p:nvSpPr>
-        <p:spPr>
-          <a:xfrm rot="13679340">
-            <a:off x="1052355" y="5610762"/>
-            <a:ext cx="501301" cy="382630"/>
-          </a:xfrm>
-          <a:prstGeom prst="rightArrow">
-            <a:avLst/>
-          </a:prstGeom>
-          <a:solidFill>
-            <a:srgbClr val="FF0000"/>
-          </a:solidFill>
-          <a:ln w="38100">
-            <a:solidFill>
-              <a:schemeClr val="tx1"/>
-            </a:solidFill>
-          </a:ln>
-        </p:spPr>
-        <p:style>
-          <a:lnRef idx="2">
-            <a:schemeClr val="accent1">
-              <a:shade val="50000"/>
-            </a:schemeClr>
-          </a:lnRef>
-          <a:fillRef idx="1">
-            <a:schemeClr val="accent1"/>
-          </a:fillRef>
-          <a:effectRef idx="0">
-            <a:schemeClr val="accent1"/>
-          </a:effectRef>
-          <a:fontRef idx="minor">
-            <a:schemeClr val="lt1"/>
-          </a:fontRef>
-        </p:style>
-        <p:txBody>
-          <a:bodyPr rtlCol="0" anchor="ctr"/>
-          <a:lstStyle/>
-          <a:p>
-            <a:pPr algn="ctr"/>
-            <a:endParaRPr kumimoji="1" lang="ja-JP" altLang="en-US"/>
-          </a:p>
-        </p:txBody>
-      </p:sp>
-      <p:sp>
-        <p:nvSpPr>
-          <p:cNvPr id="11" name="矢印: 右 10">
-            <a:extLst>
-              <a:ext uri="{FF2B5EF4-FFF2-40B4-BE49-F238E27FC236}">
-                <a16:creationId xmlns:a16="http://schemas.microsoft.com/office/drawing/2014/main" id="{59E17B67-D2E5-436B-AD74-0669DBFB699C}"/>
-              </a:ext>
-            </a:extLst>
-          </p:cNvPr>
-          <p:cNvSpPr/>
-          <p:nvPr/>
-        </p:nvSpPr>
-        <p:spPr>
-          <a:xfrm rot="8515066">
-            <a:off x="830470" y="4849453"/>
-            <a:ext cx="400567" cy="382630"/>
-          </a:xfrm>
-          <a:prstGeom prst="rightArrow">
-            <a:avLst/>
-          </a:prstGeom>
-          <a:solidFill>
-            <a:srgbClr val="FF0000"/>
-          </a:solidFill>
-          <a:ln w="38100">
-            <a:solidFill>
-              <a:schemeClr val="tx1"/>
-            </a:solidFill>
-          </a:ln>
-        </p:spPr>
-        <p:style>
-          <a:lnRef idx="2">
-            <a:schemeClr val="accent1">
-              <a:shade val="50000"/>
-            </a:schemeClr>
-          </a:lnRef>
-          <a:fillRef idx="1">
-            <a:schemeClr val="accent1"/>
-          </a:fillRef>
-          <a:effectRef idx="0">
-            <a:schemeClr val="accent1"/>
-          </a:effectRef>
-          <a:fontRef idx="minor">
-            <a:schemeClr val="lt1"/>
-          </a:fontRef>
-        </p:style>
-        <p:txBody>
-          <a:bodyPr rtlCol="0" anchor="ctr"/>
-          <a:lstStyle/>
-          <a:p>
-            <a:pPr algn="ctr"/>
-            <a:endParaRPr kumimoji="1" lang="ja-JP" altLang="en-US"/>
-          </a:p>
-        </p:txBody>
-      </p:sp>
     </p:spTree>
     <p:extLst>
       <p:ext uri="{BB962C8B-B14F-4D97-AF65-F5344CB8AC3E}">
-        <p14:creationId xmlns:p14="http://schemas.microsoft.com/office/powerpoint/2010/main" val="2646231724"/>
+        <p14:creationId xmlns:p14="http://schemas.microsoft.com/office/powerpoint/2010/main" val="3313260364"/>
       </p:ext>
     </p:extLst>
   </p:cSld>
@@ -5691,7 +5784,7 @@
         <p:spPr>
           <a:xfrm>
             <a:off x="567542" y="491954"/>
-            <a:ext cx="3199915" cy="584775"/>
+            <a:ext cx="1826141" cy="584775"/>
           </a:xfrm>
           <a:prstGeom prst="rect">
             <a:avLst/>
@@ -5705,12 +5798,8 @@
           <a:lstStyle/>
           <a:p>
             <a:r>
-              <a:rPr kumimoji="1" lang="en-US" altLang="ja-JP" sz="3200" b="1" u="sng" dirty="0"/>
-              <a:t>3D</a:t>
-            </a:r>
-            <a:r>
               <a:rPr kumimoji="1" lang="ja-JP" altLang="en-US" sz="3200" b="1" u="sng" dirty="0"/>
-              <a:t>モデルの作成</a:t>
+              <a:t>戦略処理</a:t>
             </a:r>
             <a:endParaRPr kumimoji="1" lang="en-US" altLang="ja-JP" sz="3200" b="1" u="sng" dirty="0"/>
           </a:p>
@@ -5731,7 +5820,7 @@
         <p:spPr>
           <a:xfrm>
             <a:off x="567542" y="1216429"/>
-            <a:ext cx="7571303" cy="830997"/>
+            <a:ext cx="7524817" cy="830997"/>
           </a:xfrm>
           <a:prstGeom prst="rect">
             <a:avLst/>
@@ -5745,23 +5834,24 @@
           <a:lstStyle/>
           <a:p>
             <a:r>
-              <a:rPr kumimoji="1" lang="ja-JP" altLang="en-US" sz="2400" dirty="0"/>
-              <a:t>調整が終わったら</a:t>
-            </a:r>
-            <a:r>
-              <a:rPr kumimoji="1" lang="en-US" altLang="ja-JP" sz="2400" dirty="0"/>
-              <a:t>X</a:t>
-            </a:r>
-            <a:r>
-              <a:rPr kumimoji="1" lang="ja-JP" altLang="en-US" sz="2400" dirty="0"/>
-              <a:t>ファイル形式で保存します。</a:t>
-            </a:r>
-            <a:endParaRPr kumimoji="1" lang="en-US" altLang="ja-JP" sz="2400" dirty="0"/>
-          </a:p>
-          <a:p>
+              <a:rPr lang="en-US" altLang="ja-JP" sz="2400" b="1" dirty="0" err="1">
+                <a:solidFill>
+                  <a:srgbClr val="0070C0"/>
+                </a:solidFill>
+              </a:rPr>
+              <a:t>ThinkStrategy</a:t>
+            </a:r>
+            <a:r>
+              <a:rPr lang="ja-JP" altLang="en-US" sz="2400" b="1" dirty="0">
+                <a:solidFill>
+                  <a:srgbClr val="0070C0"/>
+                </a:solidFill>
+              </a:rPr>
+              <a:t>関数</a:t>
+            </a:r>
             <a:r>
               <a:rPr lang="ja-JP" altLang="en-US" sz="2400" dirty="0"/>
-              <a:t>「</a:t>
+              <a:t>が</a:t>
             </a:r>
             <a:r>
               <a:rPr lang="ja-JP" altLang="en-US" sz="2400" b="1" dirty="0">
@@ -5769,22 +5859,37 @@
                   <a:srgbClr val="FF0000"/>
                 </a:solidFill>
               </a:rPr>
-              <a:t>ファイル　＞　名前を付けて保存</a:t>
+              <a:t>戦略のメインとなる処理</a:t>
             </a:r>
             <a:r>
               <a:rPr lang="ja-JP" altLang="en-US" sz="2400" dirty="0"/>
-              <a:t>」を選択します。</a:t>
-            </a:r>
-            <a:endParaRPr kumimoji="1" lang="en-US" altLang="ja-JP" sz="2400" dirty="0"/>
+              <a:t>です。</a:t>
+            </a:r>
+            <a:endParaRPr lang="en-US" altLang="ja-JP" sz="2400" dirty="0"/>
+          </a:p>
+          <a:p>
+            <a:r>
+              <a:rPr lang="ja-JP" altLang="en-US" sz="2400" dirty="0"/>
+              <a:t>この処理で</a:t>
+            </a:r>
+            <a:r>
+              <a:rPr lang="en-US" altLang="ja-JP" sz="2400" dirty="0"/>
+              <a:t>AI</a:t>
+            </a:r>
+            <a:r>
+              <a:rPr lang="ja-JP" altLang="en-US" sz="2400" dirty="0"/>
+              <a:t>の行動を決めることになります。</a:t>
+            </a:r>
+            <a:endParaRPr lang="en-US" altLang="ja-JP" sz="2400" dirty="0"/>
           </a:p>
         </p:txBody>
       </p:sp>
       <p:pic>
         <p:nvPicPr>
-          <p:cNvPr id="3" name="図 2">
-            <a:extLst>
-              <a:ext uri="{FF2B5EF4-FFF2-40B4-BE49-F238E27FC236}">
-                <a16:creationId xmlns:a16="http://schemas.microsoft.com/office/drawing/2014/main" id="{441418A5-930D-49F2-A721-88BA06C5DD90}"/>
+          <p:cNvPr id="5" name="図 4">
+            <a:extLst>
+              <a:ext uri="{FF2B5EF4-FFF2-40B4-BE49-F238E27FC236}">
+                <a16:creationId xmlns:a16="http://schemas.microsoft.com/office/drawing/2014/main" id="{A72EFACC-0F2B-4EDE-80E0-3AF1B4A4623F}"/>
               </a:ext>
             </a:extLst>
           </p:cNvPr>
@@ -5794,21 +5899,15 @@
           <p:nvPr/>
         </p:nvPicPr>
         <p:blipFill>
-          <a:blip r:embed="rId2">
-            <a:extLst>
-              <a:ext uri="{28A0092B-C50C-407E-A947-70E740481C1C}">
-                <a14:useLocalDpi xmlns:a14="http://schemas.microsoft.com/office/drawing/2010/main" val="0"/>
-              </a:ext>
-            </a:extLst>
-          </a:blip>
+          <a:blip r:embed="rId2"/>
           <a:stretch>
             <a:fillRect/>
           </a:stretch>
         </p:blipFill>
         <p:spPr>
           <a:xfrm>
-            <a:off x="567542" y="2185814"/>
-            <a:ext cx="5365208" cy="3656186"/>
+            <a:off x="567542" y="2187126"/>
+            <a:ext cx="4533376" cy="4372087"/>
           </a:xfrm>
           <a:prstGeom prst="rect">
             <a:avLst/>
@@ -5818,7 +5917,7 @@
     </p:spTree>
     <p:extLst>
       <p:ext uri="{BB962C8B-B14F-4D97-AF65-F5344CB8AC3E}">
-        <p14:creationId xmlns:p14="http://schemas.microsoft.com/office/powerpoint/2010/main" val="339653175"/>
+        <p14:creationId xmlns:p14="http://schemas.microsoft.com/office/powerpoint/2010/main" val="667066382"/>
       </p:ext>
     </p:extLst>
   </p:cSld>
@@ -5860,7 +5959,7 @@
         <p:spPr>
           <a:xfrm>
             <a:off x="567542" y="491954"/>
-            <a:ext cx="3199915" cy="584775"/>
+            <a:ext cx="1826141" cy="584775"/>
           </a:xfrm>
           <a:prstGeom prst="rect">
             <a:avLst/>
@@ -5874,12 +5973,8 @@
           <a:lstStyle/>
           <a:p>
             <a:r>
-              <a:rPr kumimoji="1" lang="en-US" altLang="ja-JP" sz="3200" b="1" u="sng" dirty="0"/>
-              <a:t>3D</a:t>
-            </a:r>
-            <a:r>
               <a:rPr kumimoji="1" lang="ja-JP" altLang="en-US" sz="3200" b="1" u="sng" dirty="0"/>
-              <a:t>モデルの作成</a:t>
+              <a:t>戦略処理</a:t>
             </a:r>
             <a:endParaRPr kumimoji="1" lang="en-US" altLang="ja-JP" sz="3200" b="1" u="sng" dirty="0"/>
           </a:p>
@@ -5900,7 +5995,7 @@
         <p:spPr>
           <a:xfrm>
             <a:off x="567542" y="1216429"/>
-            <a:ext cx="7473521" cy="830997"/>
+            <a:ext cx="9785051" cy="461665"/>
           </a:xfrm>
           <a:prstGeom prst="rect">
             <a:avLst/>
@@ -5914,58 +6009,43 @@
           <a:lstStyle/>
           <a:p>
             <a:r>
-              <a:rPr kumimoji="1" lang="ja-JP" altLang="en-US" sz="2400" b="1" dirty="0">
+              <a:rPr lang="en-US" altLang="ja-JP" sz="2400" b="1" dirty="0">
                 <a:solidFill>
                   <a:srgbClr val="FF0000"/>
                 </a:solidFill>
               </a:rPr>
-              <a:t>ファイルの種類を</a:t>
-            </a:r>
-            <a:r>
-              <a:rPr kumimoji="1" lang="en-US" altLang="ja-JP" sz="2400" b="1" dirty="0">
-                <a:solidFill>
-                  <a:srgbClr val="FF0000"/>
-                </a:solidFill>
-              </a:rPr>
-              <a:t>X</a:t>
-            </a:r>
-            <a:r>
-              <a:rPr kumimoji="1" lang="ja-JP" altLang="en-US" sz="2400" b="1" dirty="0">
-                <a:solidFill>
-                  <a:srgbClr val="FF0000"/>
-                </a:solidFill>
-              </a:rPr>
-              <a:t>ファイル</a:t>
-            </a:r>
-            <a:r>
-              <a:rPr kumimoji="1" lang="ja-JP" altLang="en-US" sz="2400" dirty="0"/>
-              <a:t>に指定して保存します。</a:t>
-            </a:r>
-            <a:endParaRPr kumimoji="1" lang="en-US" altLang="ja-JP" sz="2400" dirty="0"/>
-          </a:p>
-          <a:p>
+              <a:t>PlayScene.cpp</a:t>
+            </a:r>
             <a:r>
               <a:rPr lang="ja-JP" altLang="en-US" sz="2400" dirty="0"/>
-              <a:t>これで</a:t>
-            </a:r>
-            <a:r>
-              <a:rPr lang="en-US" altLang="ja-JP" sz="2400" dirty="0" err="1"/>
-              <a:t>Dxlib</a:t>
+              <a:t>で</a:t>
+            </a:r>
+            <a:r>
+              <a:rPr lang="en-US" altLang="ja-JP" sz="2400" dirty="0"/>
+              <a:t>CPU</a:t>
             </a:r>
             <a:r>
               <a:rPr lang="ja-JP" altLang="en-US" sz="2400" dirty="0"/>
-              <a:t>でも使用することができます。</a:t>
-            </a:r>
-            <a:endParaRPr kumimoji="1" lang="en-US" altLang="ja-JP" sz="2400" dirty="0"/>
+              <a:t>プレイヤーを生成し、</a:t>
+            </a:r>
+            <a:r>
+              <a:rPr lang="en-US" altLang="ja-JP" sz="2400" dirty="0"/>
+              <a:t>AI</a:t>
+            </a:r>
+            <a:r>
+              <a:rPr lang="ja-JP" altLang="en-US" sz="2400" dirty="0"/>
+              <a:t>をセットしましょう。</a:t>
+            </a:r>
+            <a:endParaRPr lang="en-US" altLang="ja-JP" sz="2400" dirty="0"/>
           </a:p>
         </p:txBody>
       </p:sp>
       <p:pic>
         <p:nvPicPr>
-          <p:cNvPr id="5" name="図 4">
-            <a:extLst>
-              <a:ext uri="{FF2B5EF4-FFF2-40B4-BE49-F238E27FC236}">
-                <a16:creationId xmlns:a16="http://schemas.microsoft.com/office/drawing/2014/main" id="{D36E4DDC-E099-43E2-858A-A14DB9772728}"/>
+          <p:cNvPr id="3" name="図 2">
+            <a:extLst>
+              <a:ext uri="{FF2B5EF4-FFF2-40B4-BE49-F238E27FC236}">
+                <a16:creationId xmlns:a16="http://schemas.microsoft.com/office/drawing/2014/main" id="{C42F6666-3F9D-499A-A35D-D536D9234D82}"/>
               </a:ext>
             </a:extLst>
           </p:cNvPr>
@@ -5975,85 +6055,25 @@
           <p:nvPr/>
         </p:nvPicPr>
         <p:blipFill>
-          <a:blip r:embed="rId2">
-            <a:extLst>
-              <a:ext uri="{28A0092B-C50C-407E-A947-70E740481C1C}">
-                <a14:useLocalDpi xmlns:a14="http://schemas.microsoft.com/office/drawing/2010/main" val="0"/>
-              </a:ext>
-            </a:extLst>
-          </a:blip>
+          <a:blip r:embed="rId2"/>
           <a:stretch>
             <a:fillRect/>
           </a:stretch>
         </p:blipFill>
         <p:spPr>
           <a:xfrm>
-            <a:off x="567542" y="2187126"/>
-            <a:ext cx="7397079" cy="4178920"/>
+            <a:off x="567542" y="1817793"/>
+            <a:ext cx="9100487" cy="4260277"/>
           </a:xfrm>
           <a:prstGeom prst="rect">
             <a:avLst/>
           </a:prstGeom>
         </p:spPr>
       </p:pic>
-      <p:sp>
-        <p:nvSpPr>
-          <p:cNvPr id="7" name="矢印: 右 6">
-            <a:extLst>
-              <a:ext uri="{FF2B5EF4-FFF2-40B4-BE49-F238E27FC236}">
-                <a16:creationId xmlns:a16="http://schemas.microsoft.com/office/drawing/2014/main" id="{BF172CFE-F36D-42AD-8978-559A81B978D8}"/>
-              </a:ext>
-            </a:extLst>
-          </p:cNvPr>
-          <p:cNvSpPr/>
-          <p:nvPr/>
-        </p:nvSpPr>
-        <p:spPr>
-          <a:xfrm rot="13679340">
-            <a:off x="1916849" y="5860453"/>
-            <a:ext cx="501301" cy="382630"/>
-          </a:xfrm>
-          <a:prstGeom prst="rightArrow">
-            <a:avLst/>
-          </a:prstGeom>
-          <a:solidFill>
-            <a:srgbClr val="FF0000"/>
-          </a:solidFill>
-          <a:ln w="38100">
-            <a:solidFill>
-              <a:schemeClr val="tx1"/>
-            </a:solidFill>
-          </a:ln>
-        </p:spPr>
-        <p:style>
-          <a:lnRef idx="2">
-            <a:schemeClr val="accent1">
-              <a:shade val="50000"/>
-            </a:schemeClr>
-          </a:lnRef>
-          <a:fillRef idx="1">
-            <a:schemeClr val="accent1"/>
-          </a:fillRef>
-          <a:effectRef idx="0">
-            <a:schemeClr val="accent1"/>
-          </a:effectRef>
-          <a:fontRef idx="minor">
-            <a:schemeClr val="lt1"/>
-          </a:fontRef>
-        </p:style>
-        <p:txBody>
-          <a:bodyPr rtlCol="0" anchor="ctr"/>
-          <a:lstStyle/>
-          <a:p>
-            <a:pPr algn="ctr"/>
-            <a:endParaRPr kumimoji="1" lang="ja-JP" altLang="en-US"/>
-          </a:p>
-        </p:txBody>
-      </p:sp>
     </p:spTree>
     <p:extLst>
       <p:ext uri="{BB962C8B-B14F-4D97-AF65-F5344CB8AC3E}">
-        <p14:creationId xmlns:p14="http://schemas.microsoft.com/office/powerpoint/2010/main" val="2669871982"/>
+        <p14:creationId xmlns:p14="http://schemas.microsoft.com/office/powerpoint/2010/main" val="1039569704"/>
       </p:ext>
     </p:extLst>
   </p:cSld>
